--- a/deck/workshop.pptx
+++ b/deck/workshop.pptx
@@ -3338,7 +3338,7 @@
                 <a:ea typeface="Calibri" pitchFamily="34" charset="-122"/>
                 <a:cs typeface="Calibri" pitchFamily="34" charset="-120"/>
               </a:rPr>
-              <a:t>Claude Code session built this entire workshop - these slides, all four apps, and the repo you'll get the link to.</a:t>
+              <a:t>Claude Code session built this whole workshop - these slides and all four apps. No template. No help. Just conversation.</a:t>
             </a:r>
             <a:endParaRPr lang="en-US" sz="2400" dirty="0"/>
           </a:p>
@@ -3640,7 +3640,7 @@
                 <a:ea typeface="Calibri" pitchFamily="34" charset="-122"/>
                 <a:cs typeface="Calibri" pitchFamily="34" charset="-120"/>
               </a:rPr>
-              <a:t>Everything's here - take it home</a:t>
+              <a:t>Your turn</a:t>
             </a:r>
             <a:endParaRPr lang="en-US" sz="5000" dirty="0"/>
           </a:p>
@@ -3679,13 +3679,13 @@
             <a:r>
               <a:rPr lang="en-US" sz="2800" dirty="0">
                 <a:solidFill>
-                  <a:srgbClr val="000000"/>
-                </a:solidFill>
-                <a:latin typeface="Calibri" pitchFamily="34" charset="0"/>
-                <a:ea typeface="Calibri" pitchFamily="34" charset="-122"/>
-                <a:cs typeface="Calibri" pitchFamily="34" charset="-120"/>
-              </a:rPr>
-              <a:t>Slides, all four apps, and the how-to cheat-sheets.</a:t>
+                  <a:srgbClr val="0070C0"/>
+                </a:solidFill>
+                <a:latin typeface="Calibri" pitchFamily="34" charset="0"/>
+                <a:ea typeface="Calibri" pitchFamily="34" charset="-122"/>
+                <a:cs typeface="Calibri" pitchFamily="34" charset="-120"/>
+              </a:rPr>
+              <a:t>Open Claude Code. Describe the thing you wish existed.</a:t>
             </a:r>
             <a:endParaRPr lang="en-US" sz="2800" dirty="0"/>
           </a:p>
@@ -3702,13 +3702,13 @@
             <a:r>
               <a:rPr lang="en-US" sz="2800" dirty="0">
                 <a:solidFill>
-                  <a:srgbClr val="800000"/>
-                </a:solidFill>
-                <a:latin typeface="Calibri" pitchFamily="34" charset="0"/>
-                <a:ea typeface="Calibri" pitchFamily="34" charset="-122"/>
-                <a:cs typeface="Calibri" pitchFamily="34" charset="-120"/>
-              </a:rPr>
-              <a:t>[ Repo QR - top right ]</a:t>
+                  <a:srgbClr val="000000"/>
+                </a:solidFill>
+                <a:latin typeface="Calibri" pitchFamily="34" charset="0"/>
+                <a:ea typeface="Calibri" pitchFamily="34" charset="-122"/>
+                <a:cs typeface="Calibri" pitchFamily="34" charset="-120"/>
+              </a:rPr>
+              <a:t>You just watched me do it - no code, no template.</a:t>
             </a:r>
             <a:endParaRPr lang="en-US" sz="2800" dirty="0"/>
           </a:p>
@@ -3743,7 +3743,7 @@
                 <a:ea typeface="Calibri" pitchFamily="34" charset="-122"/>
                 <a:cs typeface="Calibri" pitchFamily="34" charset="-120"/>
               </a:rPr>
-              <a:t>Now go build something you wished existed.</a:t>
+              <a:t>Go build something you wished existed.</a:t>
             </a:r>
             <a:endParaRPr lang="en-US" sz="2800" dirty="0"/>
           </a:p>

--- a/deck/workshop.pptx
+++ b/deck/workshop.pptx
@@ -2325,66 +2325,55 @@
           <a:chExt cx="0" cy="0"/>
         </a:xfrm>
       </p:grpSpPr>
-      <p:pic>
-        <p:nvPicPr>
-          <p:cNvPr id="2" name="Image 0" descr="/Users/batuhangundogdu/Claude Code Workshop/deck/assets/uchicago-footer.png">    </p:cNvPr>
-          <p:cNvPicPr>
-            <a:picLocks noChangeAspect="1"/>
-          </p:cNvPicPr>
-          <p:nvPr/>
-        </p:nvPicPr>
-        <p:blipFill>
-          <a:blip r:embed="rId1"/>
-          <a:stretch>
-            <a:fillRect/>
-          </a:stretch>
-        </p:blipFill>
-        <p:spPr>
-          <a:xfrm>
-            <a:off x="539496" y="6382512"/>
-            <a:ext cx="2843784" cy="475488"/>
-          </a:xfrm>
-          <a:prstGeom prst="rect">
-            <a:avLst/>
-          </a:prstGeom>
-        </p:spPr>
-      </p:pic>
-      <p:pic>
-        <p:nvPicPr>
-          <p:cNvPr id="3" name="Image 1" descr="/Users/batuhangundogdu/Claude Code Workshop/deck/assets/phoenix.png">    </p:cNvPr>
-          <p:cNvPicPr>
-            <a:picLocks noChangeAspect="1"/>
-          </p:cNvPicPr>
-          <p:nvPr/>
-        </p:nvPicPr>
-        <p:blipFill>
-          <a:blip r:embed="rId2">
-            <a:alphaModFix amt="40000"/>
-          </a:blip>
-          <a:stretch>
-            <a:fillRect/>
-          </a:stretch>
-        </p:blipFill>
-        <p:spPr>
-          <a:xfrm>
-            <a:off x="8311896" y="749808"/>
-            <a:ext cx="5769864" cy="5047488"/>
-          </a:xfrm>
-          <a:prstGeom prst="rect">
-            <a:avLst/>
-          </a:prstGeom>
-        </p:spPr>
-      </p:pic>
-      <p:sp>
-        <p:nvSpPr>
-          <p:cNvPr id="4" name="Text 0"/>
-          <p:cNvSpPr/>
-          <p:nvPr/>
-        </p:nvSpPr>
-        <p:spPr>
-          <a:xfrm>
-            <a:off x="914400" y="1197864"/>
-            <a:ext cx="7607808" cy="2386584"/>
+      <p:sp>
+        <p:nvSpPr>
+          <p:cNvPr id="2" name="Text 0"/>
+          <p:cNvSpPr/>
+          <p:nvPr/>
+        </p:nvSpPr>
+        <p:spPr>
+          <a:xfrm>
+            <a:off x="-365760" y="1280160"/>
+            <a:ext cx="12920472" cy="4206240"/>
+          </a:xfrm>
+          <a:prstGeom prst="rect">
+            <a:avLst/>
+          </a:prstGeom>
+          <a:noFill/>
+          <a:ln/>
+        </p:spPr>
+        <p:txBody>
+          <a:bodyPr wrap="square" lIns="0" tIns="0" rIns="0" bIns="0" rtlCol="0" anchor="ctr"/>
+          <a:lstStyle/>
+          <a:p>
+            <a:pPr algn="l" indent="0" marL="0">
+              <a:buNone/>
+            </a:pPr>
+            <a:r>
+              <a:rPr lang="en-US" sz="21000" b="1" dirty="0">
+                <a:solidFill>
+                  <a:srgbClr val="F1F2F1"/>
+                </a:solidFill>
+                <a:latin typeface="Avenir Next" pitchFamily="34" charset="0"/>
+                <a:ea typeface="Avenir Next" pitchFamily="34" charset="-122"/>
+                <a:cs typeface="Avenir Next" pitchFamily="34" charset="-120"/>
+              </a:rPr>
+              <a:t>talk</a:t>
+            </a:r>
+            <a:endParaRPr lang="en-US" sz="21000" dirty="0"/>
+          </a:p>
+        </p:txBody>
+      </p:sp>
+      <p:sp>
+        <p:nvSpPr>
+          <p:cNvPr id="3" name="Text 1"/>
+          <p:cNvSpPr/>
+          <p:nvPr/>
+        </p:nvSpPr>
+        <p:spPr>
+          <a:xfrm>
+            <a:off x="822960" y="2331720"/>
+            <a:ext cx="10543032" cy="1828800"/>
           </a:xfrm>
           <a:prstGeom prst="rect">
             <a:avLst/>
@@ -2403,30 +2392,50 @@
               <a:buNone/>
             </a:pPr>
             <a:r>
-              <a:rPr lang="en-US" sz="6000" b="1" dirty="0">
-                <a:solidFill>
-                  <a:srgbClr val="000000"/>
-                </a:solidFill>
-                <a:latin typeface="Calibri" pitchFamily="34" charset="0"/>
-                <a:ea typeface="Calibri" pitchFamily="34" charset="-122"/>
-                <a:cs typeface="Calibri" pitchFamily="34" charset="-120"/>
+              <a:rPr lang="en-US" sz="5400" b="1" dirty="0">
+                <a:solidFill>
+                  <a:srgbClr val="111111"/>
+                </a:solidFill>
+                <a:latin typeface="Avenir Next" pitchFamily="34" charset="0"/>
+                <a:ea typeface="Avenir Next" pitchFamily="34" charset="-122"/>
+                <a:cs typeface="Avenir Next" pitchFamily="34" charset="-120"/>
               </a:rPr>
               <a:t>Talk to Your Computer</a:t>
             </a:r>
-            <a:endParaRPr lang="en-US" sz="6000" dirty="0"/>
-          </a:p>
-        </p:txBody>
-      </p:sp>
-      <p:sp>
-        <p:nvSpPr>
-          <p:cNvPr id="5" name="Text 1"/>
-          <p:cNvSpPr/>
-          <p:nvPr/>
-        </p:nvSpPr>
-        <p:spPr>
-          <a:xfrm>
-            <a:off x="950976" y="3685032"/>
-            <a:ext cx="5550408" cy="621792"/>
+            <a:endParaRPr lang="en-US" sz="5400" dirty="0"/>
+          </a:p>
+        </p:txBody>
+      </p:sp>
+      <p:sp>
+        <p:nvSpPr>
+          <p:cNvPr id="4" name="Shape 2"/>
+          <p:cNvSpPr/>
+          <p:nvPr/>
+        </p:nvSpPr>
+        <p:spPr>
+          <a:xfrm>
+            <a:off x="822960" y="4224528"/>
+            <a:ext cx="914400" cy="41148"/>
+          </a:xfrm>
+          <a:prstGeom prst="rect">
+            <a:avLst/>
+          </a:prstGeom>
+          <a:solidFill>
+            <a:srgbClr val="2E7A72"/>
+          </a:solidFill>
+          <a:ln/>
+        </p:spPr>
+      </p:sp>
+      <p:sp>
+        <p:nvSpPr>
+          <p:cNvPr id="5" name="Text 3"/>
+          <p:cNvSpPr/>
+          <p:nvPr/>
+        </p:nvSpPr>
+        <p:spPr>
+          <a:xfrm>
+            <a:off x="822960" y="4389120"/>
+            <a:ext cx="10543032" cy="548640"/>
           </a:xfrm>
           <a:prstGeom prst="rect">
             <a:avLst/>
@@ -2442,30 +2451,30 @@
               <a:buNone/>
             </a:pPr>
             <a:r>
-              <a:rPr lang="en-US" sz="2000" dirty="0">
-                <a:solidFill>
-                  <a:srgbClr val="1F4E79"/>
-                </a:solidFill>
-                <a:latin typeface="Calibri" pitchFamily="34" charset="0"/>
-                <a:ea typeface="Calibri" pitchFamily="34" charset="-122"/>
-                <a:cs typeface="Calibri" pitchFamily="34" charset="-120"/>
-              </a:rPr>
-              <a:t>Claude Code for everyday work  ·  UChicago × Anthropic  ·  Batuhan Gundogdu</a:t>
-            </a:r>
-            <a:endParaRPr lang="en-US" sz="2000" dirty="0"/>
-          </a:p>
-        </p:txBody>
-      </p:sp>
-      <p:sp>
-        <p:nvSpPr>
-          <p:cNvPr id="6" name="Text 2"/>
-          <p:cNvSpPr/>
-          <p:nvPr/>
-        </p:nvSpPr>
-        <p:spPr>
-          <a:xfrm>
-            <a:off x="2743200" y="4937760"/>
-            <a:ext cx="4572000" cy="822960"/>
+              <a:rPr lang="en-US" sz="1400" spc="150" kern="0" dirty="0">
+                <a:solidFill>
+                  <a:srgbClr val="9A9A9A"/>
+                </a:solidFill>
+                <a:latin typeface="Avenir Next" pitchFamily="34" charset="0"/>
+                <a:ea typeface="Avenir Next" pitchFamily="34" charset="-122"/>
+                <a:cs typeface="Avenir Next" pitchFamily="34" charset="-120"/>
+              </a:rPr>
+              <a:t>CLAUDE CODE FOR EVERYDAY WORK  ·  UCHICAGO × ANTHROPIC  ·  BATUHAN GUNDOGDU</a:t>
+            </a:r>
+            <a:endParaRPr lang="en-US" sz="1400" dirty="0"/>
+          </a:p>
+        </p:txBody>
+      </p:sp>
+      <p:sp>
+        <p:nvSpPr>
+          <p:cNvPr id="6" name="Text 4"/>
+          <p:cNvSpPr/>
+          <p:nvPr/>
+        </p:nvSpPr>
+        <p:spPr>
+          <a:xfrm>
+            <a:off x="822960" y="5029200"/>
+            <a:ext cx="10543032" cy="457200"/>
           </a:xfrm>
           <a:prstGeom prst="rect">
             <a:avLst/>
@@ -2481,17 +2490,17 @@
               <a:buNone/>
             </a:pPr>
             <a:r>
-              <a:rPr lang="en-US" sz="4000" b="1" dirty="0">
-                <a:solidFill>
-                  <a:srgbClr val="800000"/>
-                </a:solidFill>
-                <a:latin typeface="Calibri" pitchFamily="34" charset="0"/>
-                <a:ea typeface="Calibri" pitchFamily="34" charset="-122"/>
-                <a:cs typeface="Calibri" pitchFamily="34" charset="-120"/>
-              </a:rPr>
-              <a:t>Intro Session</a:t>
-            </a:r>
-            <a:endParaRPr lang="en-US" sz="4000" dirty="0"/>
+              <a:rPr lang="en-US" sz="1400" b="1" spc="200" kern="0" dirty="0">
+                <a:solidFill>
+                  <a:srgbClr val="2E7A72"/>
+                </a:solidFill>
+                <a:latin typeface="Avenir Next" pitchFamily="34" charset="0"/>
+                <a:ea typeface="Avenir Next" pitchFamily="34" charset="-122"/>
+                <a:cs typeface="Avenir Next" pitchFamily="34" charset="-120"/>
+              </a:rPr>
+              <a:t>INTRO SESSION</a:t>
+            </a:r>
+            <a:endParaRPr lang="en-US" sz="1400" dirty="0"/>
           </a:p>
         </p:txBody>
       </p:sp>
@@ -2520,40 +2529,16 @@
           <a:chExt cx="0" cy="0"/>
         </a:xfrm>
       </p:grpSpPr>
-      <p:pic>
-        <p:nvPicPr>
-          <p:cNvPr id="2" name="Image 0" descr="/Users/batuhangundogdu/Claude Code Workshop/deck/assets/uchicago-footer.png">    </p:cNvPr>
-          <p:cNvPicPr>
-            <a:picLocks noChangeAspect="1"/>
-          </p:cNvPicPr>
-          <p:nvPr/>
-        </p:nvPicPr>
-        <p:blipFill>
-          <a:blip r:embed="rId1"/>
-          <a:stretch>
-            <a:fillRect/>
-          </a:stretch>
-        </p:blipFill>
-        <p:spPr>
-          <a:xfrm>
-            <a:off x="539496" y="6382512"/>
-            <a:ext cx="2843784" cy="475488"/>
-          </a:xfrm>
-          <a:prstGeom prst="rect">
-            <a:avLst/>
-          </a:prstGeom>
-        </p:spPr>
-      </p:pic>
-      <p:sp>
-        <p:nvSpPr>
-          <p:cNvPr id="3" name="Text 0"/>
-          <p:cNvSpPr/>
-          <p:nvPr/>
-        </p:nvSpPr>
-        <p:spPr>
-          <a:xfrm>
-            <a:off x="548640" y="2468880"/>
-            <a:ext cx="11091672" cy="457200"/>
+      <p:sp>
+        <p:nvSpPr>
+          <p:cNvPr id="2" name="Text 0"/>
+          <p:cNvSpPr/>
+          <p:nvPr/>
+        </p:nvSpPr>
+        <p:spPr>
+          <a:xfrm>
+            <a:off x="822960" y="2514600"/>
+            <a:ext cx="10543032" cy="365760"/>
           </a:xfrm>
           <a:prstGeom prst="rect">
             <a:avLst/>
@@ -2569,30 +2554,50 @@
               <a:buNone/>
             </a:pPr>
             <a:r>
-              <a:rPr lang="en-US" sz="2400" spc="200" kern="0" dirty="0">
-                <a:solidFill>
-                  <a:srgbClr val="800000"/>
-                </a:solidFill>
-                <a:latin typeface="Calibri" pitchFamily="34" charset="0"/>
-                <a:ea typeface="Calibri" pitchFamily="34" charset="-122"/>
-                <a:cs typeface="Calibri" pitchFamily="34" charset="-120"/>
+              <a:rPr lang="en-US" sz="1500" b="1" spc="300" kern="0" dirty="0">
+                <a:solidFill>
+                  <a:srgbClr val="2E7A72"/>
+                </a:solidFill>
+                <a:latin typeface="Avenir Next" pitchFamily="34" charset="0"/>
+                <a:ea typeface="Avenir Next" pitchFamily="34" charset="-122"/>
+                <a:cs typeface="Avenir Next" pitchFamily="34" charset="-120"/>
               </a:rPr>
               <a:t>DEMO 2</a:t>
             </a:r>
-            <a:endParaRPr lang="en-US" sz="2400" dirty="0"/>
-          </a:p>
-        </p:txBody>
-      </p:sp>
-      <p:sp>
-        <p:nvSpPr>
-          <p:cNvPr id="4" name="Text 1"/>
-          <p:cNvSpPr/>
-          <p:nvPr/>
-        </p:nvSpPr>
-        <p:spPr>
-          <a:xfrm>
-            <a:off x="548640" y="2926080"/>
-            <a:ext cx="11091672" cy="1463040"/>
+            <a:endParaRPr lang="en-US" sz="1500" dirty="0"/>
+          </a:p>
+        </p:txBody>
+      </p:sp>
+      <p:sp>
+        <p:nvSpPr>
+          <p:cNvPr id="3" name="Shape 1"/>
+          <p:cNvSpPr/>
+          <p:nvPr/>
+        </p:nvSpPr>
+        <p:spPr>
+          <a:xfrm>
+            <a:off x="822960" y="2926080"/>
+            <a:ext cx="566928" cy="41148"/>
+          </a:xfrm>
+          <a:prstGeom prst="rect">
+            <a:avLst/>
+          </a:prstGeom>
+          <a:solidFill>
+            <a:srgbClr val="2E7A72"/>
+          </a:solidFill>
+          <a:ln/>
+        </p:spPr>
+      </p:sp>
+      <p:sp>
+        <p:nvSpPr>
+          <p:cNvPr id="4" name="Text 2"/>
+          <p:cNvSpPr/>
+          <p:nvPr/>
+        </p:nvSpPr>
+        <p:spPr>
+          <a:xfrm>
+            <a:off x="822960" y="3108960"/>
+            <a:ext cx="10543032" cy="1463040"/>
           </a:xfrm>
           <a:prstGeom prst="rect">
             <a:avLst/>
@@ -2605,20 +2610,23 @@
           <a:lstStyle/>
           <a:p>
             <a:pPr algn="l" indent="0" marL="0">
-              <a:buNone/>
-            </a:pPr>
-            <a:r>
-              <a:rPr lang="en-US" sz="5000" b="1" dirty="0">
-                <a:solidFill>
-                  <a:srgbClr val="000000"/>
-                </a:solidFill>
-                <a:latin typeface="Calibri" pitchFamily="34" charset="0"/>
-                <a:ea typeface="Calibri" pitchFamily="34" charset="-122"/>
-                <a:cs typeface="Calibri" pitchFamily="34" charset="-120"/>
+              <a:lnSpc>
+                <a:spcPct val="98000"/>
+              </a:lnSpc>
+              <a:buNone/>
+            </a:pPr>
+            <a:r>
+              <a:rPr lang="en-US" sz="4400" b="1" dirty="0">
+                <a:solidFill>
+                  <a:srgbClr val="111111"/>
+                </a:solidFill>
+                <a:latin typeface="Avenir Next" pitchFamily="34" charset="0"/>
+                <a:ea typeface="Avenir Next" pitchFamily="34" charset="-122"/>
+                <a:cs typeface="Avenir Next" pitchFamily="34" charset="-120"/>
               </a:rPr>
               <a:t>Research Paper Tracker</a:t>
             </a:r>
-            <a:endParaRPr lang="en-US" sz="5000" dirty="0"/>
+            <a:endParaRPr lang="en-US" sz="4400" dirty="0"/>
           </a:p>
         </p:txBody>
       </p:sp>
@@ -2647,40 +2655,16 @@
           <a:chExt cx="0" cy="0"/>
         </a:xfrm>
       </p:grpSpPr>
-      <p:pic>
-        <p:nvPicPr>
-          <p:cNvPr id="2" name="Image 0" descr="/Users/batuhangundogdu/Claude Code Workshop/deck/assets/uchicago-footer.png">    </p:cNvPr>
-          <p:cNvPicPr>
-            <a:picLocks noChangeAspect="1"/>
-          </p:cNvPicPr>
-          <p:nvPr/>
-        </p:nvPicPr>
-        <p:blipFill>
-          <a:blip r:embed="rId1"/>
-          <a:stretch>
-            <a:fillRect/>
-          </a:stretch>
-        </p:blipFill>
-        <p:spPr>
-          <a:xfrm>
-            <a:off x="539496" y="6382512"/>
-            <a:ext cx="2843784" cy="475488"/>
-          </a:xfrm>
-          <a:prstGeom prst="rect">
-            <a:avLst/>
-          </a:prstGeom>
-        </p:spPr>
-      </p:pic>
-      <p:sp>
-        <p:nvSpPr>
-          <p:cNvPr id="3" name="Text 0"/>
-          <p:cNvSpPr/>
-          <p:nvPr/>
-        </p:nvSpPr>
-        <p:spPr>
-          <a:xfrm>
-            <a:off x="548640" y="2468880"/>
-            <a:ext cx="11091672" cy="457200"/>
+      <p:sp>
+        <p:nvSpPr>
+          <p:cNvPr id="2" name="Text 0"/>
+          <p:cNvSpPr/>
+          <p:nvPr/>
+        </p:nvSpPr>
+        <p:spPr>
+          <a:xfrm>
+            <a:off x="822960" y="2514600"/>
+            <a:ext cx="10543032" cy="365760"/>
           </a:xfrm>
           <a:prstGeom prst="rect">
             <a:avLst/>
@@ -2696,30 +2680,50 @@
               <a:buNone/>
             </a:pPr>
             <a:r>
-              <a:rPr lang="en-US" sz="2400" spc="200" kern="0" dirty="0">
-                <a:solidFill>
-                  <a:srgbClr val="800000"/>
-                </a:solidFill>
-                <a:latin typeface="Calibri" pitchFamily="34" charset="0"/>
-                <a:ea typeface="Calibri" pitchFamily="34" charset="-122"/>
-                <a:cs typeface="Calibri" pitchFamily="34" charset="-120"/>
+              <a:rPr lang="en-US" sz="1500" b="1" spc="300" kern="0" dirty="0">
+                <a:solidFill>
+                  <a:srgbClr val="2E7A72"/>
+                </a:solidFill>
+                <a:latin typeface="Avenir Next" pitchFamily="34" charset="0"/>
+                <a:ea typeface="Avenir Next" pitchFamily="34" charset="-122"/>
+                <a:cs typeface="Avenir Next" pitchFamily="34" charset="-120"/>
               </a:rPr>
               <a:t>DEMO 3</a:t>
             </a:r>
-            <a:endParaRPr lang="en-US" sz="2400" dirty="0"/>
-          </a:p>
-        </p:txBody>
-      </p:sp>
-      <p:sp>
-        <p:nvSpPr>
-          <p:cNvPr id="4" name="Text 1"/>
-          <p:cNvSpPr/>
-          <p:nvPr/>
-        </p:nvSpPr>
-        <p:spPr>
-          <a:xfrm>
-            <a:off x="548640" y="2926080"/>
-            <a:ext cx="11091672" cy="1463040"/>
+            <a:endParaRPr lang="en-US" sz="1500" dirty="0"/>
+          </a:p>
+        </p:txBody>
+      </p:sp>
+      <p:sp>
+        <p:nvSpPr>
+          <p:cNvPr id="3" name="Shape 1"/>
+          <p:cNvSpPr/>
+          <p:nvPr/>
+        </p:nvSpPr>
+        <p:spPr>
+          <a:xfrm>
+            <a:off x="822960" y="2926080"/>
+            <a:ext cx="566928" cy="41148"/>
+          </a:xfrm>
+          <a:prstGeom prst="rect">
+            <a:avLst/>
+          </a:prstGeom>
+          <a:solidFill>
+            <a:srgbClr val="2E7A72"/>
+          </a:solidFill>
+          <a:ln/>
+        </p:spPr>
+      </p:sp>
+      <p:sp>
+        <p:nvSpPr>
+          <p:cNvPr id="4" name="Text 2"/>
+          <p:cNvSpPr/>
+          <p:nvPr/>
+        </p:nvSpPr>
+        <p:spPr>
+          <a:xfrm>
+            <a:off x="822960" y="3108960"/>
+            <a:ext cx="10543032" cy="1463040"/>
           </a:xfrm>
           <a:prstGeom prst="rect">
             <a:avLst/>
@@ -2732,20 +2736,23 @@
           <a:lstStyle/>
           <a:p>
             <a:pPr algn="l" indent="0" marL="0">
-              <a:buNone/>
-            </a:pPr>
-            <a:r>
-              <a:rPr lang="en-US" sz="5000" b="1" dirty="0">
-                <a:solidFill>
-                  <a:srgbClr val="000000"/>
-                </a:solidFill>
-                <a:latin typeface="Calibri" pitchFamily="34" charset="0"/>
-                <a:ea typeface="Calibri" pitchFamily="34" charset="-122"/>
-                <a:cs typeface="Calibri" pitchFamily="34" charset="-120"/>
+              <a:lnSpc>
+                <a:spcPct val="98000"/>
+              </a:lnSpc>
+              <a:buNone/>
+            </a:pPr>
+            <a:r>
+              <a:rPr lang="en-US" sz="4400" b="1" dirty="0">
+                <a:solidFill>
+                  <a:srgbClr val="111111"/>
+                </a:solidFill>
+                <a:latin typeface="Avenir Next" pitchFamily="34" charset="0"/>
+                <a:ea typeface="Avenir Next" pitchFamily="34" charset="-122"/>
+                <a:cs typeface="Avenir Next" pitchFamily="34" charset="-120"/>
               </a:rPr>
               <a:t>Daily Dashboard</a:t>
             </a:r>
-            <a:endParaRPr lang="en-US" sz="5000" dirty="0"/>
+            <a:endParaRPr lang="en-US" sz="4400" dirty="0"/>
           </a:p>
         </p:txBody>
       </p:sp>
@@ -2774,40 +2781,16 @@
           <a:chExt cx="0" cy="0"/>
         </a:xfrm>
       </p:grpSpPr>
-      <p:pic>
-        <p:nvPicPr>
-          <p:cNvPr id="2" name="Image 0" descr="/Users/batuhangundogdu/Claude Code Workshop/deck/assets/uchicago-footer.png">    </p:cNvPr>
-          <p:cNvPicPr>
-            <a:picLocks noChangeAspect="1"/>
-          </p:cNvPicPr>
-          <p:nvPr/>
-        </p:nvPicPr>
-        <p:blipFill>
-          <a:blip r:embed="rId1"/>
-          <a:stretch>
-            <a:fillRect/>
-          </a:stretch>
-        </p:blipFill>
-        <p:spPr>
-          <a:xfrm>
-            <a:off x="539496" y="6382512"/>
-            <a:ext cx="2843784" cy="475488"/>
-          </a:xfrm>
-          <a:prstGeom prst="rect">
-            <a:avLst/>
-          </a:prstGeom>
-        </p:spPr>
-      </p:pic>
-      <p:sp>
-        <p:nvSpPr>
-          <p:cNvPr id="3" name="Text 0"/>
-          <p:cNvSpPr/>
-          <p:nvPr/>
-        </p:nvSpPr>
-        <p:spPr>
-          <a:xfrm>
-            <a:off x="548640" y="2468880"/>
-            <a:ext cx="11091672" cy="457200"/>
+      <p:sp>
+        <p:nvSpPr>
+          <p:cNvPr id="2" name="Text 0"/>
+          <p:cNvSpPr/>
+          <p:nvPr/>
+        </p:nvSpPr>
+        <p:spPr>
+          <a:xfrm>
+            <a:off x="822960" y="2514600"/>
+            <a:ext cx="10543032" cy="365760"/>
           </a:xfrm>
           <a:prstGeom prst="rect">
             <a:avLst/>
@@ -2823,30 +2806,50 @@
               <a:buNone/>
             </a:pPr>
             <a:r>
-              <a:rPr lang="en-US" sz="2400" spc="200" kern="0" dirty="0">
-                <a:solidFill>
-                  <a:srgbClr val="800000"/>
-                </a:solidFill>
-                <a:latin typeface="Calibri" pitchFamily="34" charset="0"/>
-                <a:ea typeface="Calibri" pitchFamily="34" charset="-122"/>
-                <a:cs typeface="Calibri" pitchFamily="34" charset="-120"/>
+              <a:rPr lang="en-US" sz="1500" b="1" spc="300" kern="0" dirty="0">
+                <a:solidFill>
+                  <a:srgbClr val="2E7A72"/>
+                </a:solidFill>
+                <a:latin typeface="Avenir Next" pitchFamily="34" charset="0"/>
+                <a:ea typeface="Avenir Next" pitchFamily="34" charset="-122"/>
+                <a:cs typeface="Avenir Next" pitchFamily="34" charset="-120"/>
               </a:rPr>
               <a:t>DEMO 4</a:t>
             </a:r>
-            <a:endParaRPr lang="en-US" sz="2400" dirty="0"/>
-          </a:p>
-        </p:txBody>
-      </p:sp>
-      <p:sp>
-        <p:nvSpPr>
-          <p:cNvPr id="4" name="Text 1"/>
-          <p:cNvSpPr/>
-          <p:nvPr/>
-        </p:nvSpPr>
-        <p:spPr>
-          <a:xfrm>
-            <a:off x="548640" y="2926080"/>
-            <a:ext cx="11091672" cy="1463040"/>
+            <a:endParaRPr lang="en-US" sz="1500" dirty="0"/>
+          </a:p>
+        </p:txBody>
+      </p:sp>
+      <p:sp>
+        <p:nvSpPr>
+          <p:cNvPr id="3" name="Shape 1"/>
+          <p:cNvSpPr/>
+          <p:nvPr/>
+        </p:nvSpPr>
+        <p:spPr>
+          <a:xfrm>
+            <a:off x="822960" y="2926080"/>
+            <a:ext cx="566928" cy="41148"/>
+          </a:xfrm>
+          <a:prstGeom prst="rect">
+            <a:avLst/>
+          </a:prstGeom>
+          <a:solidFill>
+            <a:srgbClr val="2E7A72"/>
+          </a:solidFill>
+          <a:ln/>
+        </p:spPr>
+      </p:sp>
+      <p:sp>
+        <p:nvSpPr>
+          <p:cNvPr id="4" name="Text 2"/>
+          <p:cNvSpPr/>
+          <p:nvPr/>
+        </p:nvSpPr>
+        <p:spPr>
+          <a:xfrm>
+            <a:off x="822960" y="3108960"/>
+            <a:ext cx="10543032" cy="1463040"/>
           </a:xfrm>
           <a:prstGeom prst="rect">
             <a:avLst/>
@@ -2859,20 +2862,23 @@
           <a:lstStyle/>
           <a:p>
             <a:pPr algn="l" indent="0" marL="0">
-              <a:buNone/>
-            </a:pPr>
-            <a:r>
-              <a:rPr lang="en-US" sz="5000" b="1" dirty="0">
-                <a:solidFill>
-                  <a:srgbClr val="000000"/>
-                </a:solidFill>
-                <a:latin typeface="Calibri" pitchFamily="34" charset="0"/>
-                <a:ea typeface="Calibri" pitchFamily="34" charset="-122"/>
-                <a:cs typeface="Calibri" pitchFamily="34" charset="-120"/>
+              <a:lnSpc>
+                <a:spcPct val="98000"/>
+              </a:lnSpc>
+              <a:buNone/>
+            </a:pPr>
+            <a:r>
+              <a:rPr lang="en-US" sz="4400" b="1" dirty="0">
+                <a:solidFill>
+                  <a:srgbClr val="111111"/>
+                </a:solidFill>
+                <a:latin typeface="Avenir Next" pitchFamily="34" charset="0"/>
+                <a:ea typeface="Avenir Next" pitchFamily="34" charset="-122"/>
+                <a:cs typeface="Avenir Next" pitchFamily="34" charset="-120"/>
               </a:rPr>
               <a:t>Teaching Assistant</a:t>
             </a:r>
-            <a:endParaRPr lang="en-US" sz="5000" dirty="0"/>
+            <a:endParaRPr lang="en-US" sz="4400" dirty="0"/>
           </a:p>
         </p:txBody>
       </p:sp>
@@ -2901,40 +2907,16 @@
           <a:chExt cx="0" cy="0"/>
         </a:xfrm>
       </p:grpSpPr>
-      <p:pic>
-        <p:nvPicPr>
-          <p:cNvPr id="2" name="Image 0" descr="/Users/batuhangundogdu/Claude Code Workshop/deck/assets/uchicago-footer.png">    </p:cNvPr>
-          <p:cNvPicPr>
-            <a:picLocks noChangeAspect="1"/>
-          </p:cNvPicPr>
-          <p:nvPr/>
-        </p:nvPicPr>
-        <p:blipFill>
-          <a:blip r:embed="rId1"/>
-          <a:stretch>
-            <a:fillRect/>
-          </a:stretch>
-        </p:blipFill>
-        <p:spPr>
-          <a:xfrm>
-            <a:off x="539496" y="6382512"/>
-            <a:ext cx="2843784" cy="475488"/>
-          </a:xfrm>
-          <a:prstGeom prst="rect">
-            <a:avLst/>
-          </a:prstGeom>
-        </p:spPr>
-      </p:pic>
-      <p:sp>
-        <p:nvSpPr>
-          <p:cNvPr id="3" name="Text 0"/>
-          <p:cNvSpPr/>
-          <p:nvPr/>
-        </p:nvSpPr>
-        <p:spPr>
-          <a:xfrm>
-            <a:off x="548640" y="365760"/>
-            <a:ext cx="11091672" cy="1188720"/>
+      <p:sp>
+        <p:nvSpPr>
+          <p:cNvPr id="2" name="Text 0"/>
+          <p:cNvSpPr/>
+          <p:nvPr/>
+        </p:nvSpPr>
+        <p:spPr>
+          <a:xfrm>
+            <a:off x="822960" y="658368"/>
+            <a:ext cx="10543032" cy="274320"/>
           </a:xfrm>
           <a:prstGeom prst="rect">
             <a:avLst/>
@@ -2950,30 +2932,92 @@
               <a:buNone/>
             </a:pPr>
             <a:r>
-              <a:rPr lang="en-US" sz="5000" b="1" dirty="0">
-                <a:solidFill>
-                  <a:srgbClr val="000000"/>
-                </a:solidFill>
-                <a:latin typeface="Calibri" pitchFamily="34" charset="0"/>
-                <a:ea typeface="Calibri" pitchFamily="34" charset="-122"/>
-                <a:cs typeface="Calibri" pitchFamily="34" charset="-120"/>
+              <a:rPr lang="en-US" sz="1200" b="1" spc="250" kern="0" dirty="0">
+                <a:solidFill>
+                  <a:srgbClr val="9A9A9A"/>
+                </a:solidFill>
+                <a:latin typeface="Avenir Next" pitchFamily="34" charset="0"/>
+                <a:ea typeface="Avenir Next" pitchFamily="34" charset="-122"/>
+                <a:cs typeface="Avenir Next" pitchFamily="34" charset="-120"/>
+              </a:rPr>
+              <a:t>THE RECURRING BEAT</a:t>
+            </a:r>
+            <a:endParaRPr lang="en-US" sz="1200" dirty="0"/>
+          </a:p>
+        </p:txBody>
+      </p:sp>
+      <p:sp>
+        <p:nvSpPr>
+          <p:cNvPr id="3" name="Shape 1"/>
+          <p:cNvSpPr/>
+          <p:nvPr/>
+        </p:nvSpPr>
+        <p:spPr>
+          <a:xfrm>
+            <a:off x="822960" y="969264"/>
+            <a:ext cx="566928" cy="41148"/>
+          </a:xfrm>
+          <a:prstGeom prst="rect">
+            <a:avLst/>
+          </a:prstGeom>
+          <a:solidFill>
+            <a:srgbClr val="2E7A72"/>
+          </a:solidFill>
+          <a:ln/>
+        </p:spPr>
+      </p:sp>
+      <p:sp>
+        <p:nvSpPr>
+          <p:cNvPr id="4" name="Text 2"/>
+          <p:cNvSpPr/>
+          <p:nvPr/>
+        </p:nvSpPr>
+        <p:spPr>
+          <a:xfrm>
+            <a:off x="822960" y="1161288"/>
+            <a:ext cx="10543032" cy="1188720"/>
+          </a:xfrm>
+          <a:prstGeom prst="rect">
+            <a:avLst/>
+          </a:prstGeom>
+          <a:noFill/>
+          <a:ln/>
+        </p:spPr>
+        <p:txBody>
+          <a:bodyPr wrap="square" lIns="0" tIns="0" rIns="0" bIns="0" rtlCol="0" anchor="t"/>
+          <a:lstStyle/>
+          <a:p>
+            <a:pPr algn="l" indent="0" marL="0">
+              <a:lnSpc>
+                <a:spcPct val="98000"/>
+              </a:lnSpc>
+              <a:buNone/>
+            </a:pPr>
+            <a:r>
+              <a:rPr lang="en-US" sz="4000" b="1" dirty="0">
+                <a:solidFill>
+                  <a:srgbClr val="111111"/>
+                </a:solidFill>
+                <a:latin typeface="Avenir Next" pitchFamily="34" charset="0"/>
+                <a:ea typeface="Avenir Next" pitchFamily="34" charset="-122"/>
+                <a:cs typeface="Avenir Next" pitchFamily="34" charset="-120"/>
               </a:rPr>
               <a:t>Don't like it? Just say so.</a:t>
             </a:r>
-            <a:endParaRPr lang="en-US" sz="5000" dirty="0"/>
-          </a:p>
-        </p:txBody>
-      </p:sp>
-      <p:sp>
-        <p:nvSpPr>
-          <p:cNvPr id="4" name="Text 1"/>
-          <p:cNvSpPr/>
-          <p:nvPr/>
-        </p:nvSpPr>
-        <p:spPr>
-          <a:xfrm>
-            <a:off x="548640" y="1920240"/>
-            <a:ext cx="11091672" cy="4297680"/>
+            <a:endParaRPr lang="en-US" sz="4000" dirty="0"/>
+          </a:p>
+        </p:txBody>
+      </p:sp>
+      <p:sp>
+        <p:nvSpPr>
+          <p:cNvPr id="5" name="Text 3"/>
+          <p:cNvSpPr/>
+          <p:nvPr/>
+        </p:nvSpPr>
+        <p:spPr>
+          <a:xfrm>
+            <a:off x="822960" y="2441448"/>
+            <a:ext cx="10543032" cy="3959352"/>
           </a:xfrm>
           <a:prstGeom prst="rect">
             <a:avLst/>
@@ -2987,106 +3031,106 @@
           <a:p>
             <a:pPr algn="l" indent="0" marL="0">
               <a:lnSpc>
-                <a:spcPct val="110000"/>
+                <a:spcPct val="115000"/>
               </a:lnSpc>
               <a:spcAft>
-                <a:spcPts val="1800"/>
+                <a:spcPts val="1600"/>
               </a:spcAft>
               <a:buNone/>
             </a:pPr>
             <a:r>
-              <a:rPr lang="en-US" sz="2800" dirty="0">
-                <a:solidFill>
-                  <a:srgbClr val="0070C0"/>
-                </a:solidFill>
-                <a:latin typeface="Calibri" pitchFamily="34" charset="0"/>
-                <a:ea typeface="Calibri" pitchFamily="34" charset="-122"/>
-                <a:cs typeface="Calibri" pitchFamily="34" charset="-120"/>
+              <a:rPr lang="en-US" sz="2000" dirty="0">
+                <a:solidFill>
+                  <a:srgbClr val="2E7A72"/>
+                </a:solidFill>
+                <a:latin typeface="Avenir Next" pitchFamily="34" charset="0"/>
+                <a:ea typeface="Avenir Next" pitchFamily="34" charset="-122"/>
+                <a:cs typeface="Avenir Next" pitchFamily="34" charset="-120"/>
               </a:rPr>
               <a:t>“Make it dark.”</a:t>
             </a:r>
-            <a:endParaRPr lang="en-US" sz="2800" dirty="0"/>
+            <a:endParaRPr lang="en-US" sz="2000" dirty="0"/>
           </a:p>
           <a:p>
             <a:pPr algn="l" indent="0" marL="0">
               <a:lnSpc>
-                <a:spcPct val="110000"/>
+                <a:spcPct val="115000"/>
               </a:lnSpc>
               <a:spcAft>
-                <a:spcPts val="1800"/>
+                <a:spcPts val="1600"/>
               </a:spcAft>
               <a:buNone/>
             </a:pPr>
             <a:r>
-              <a:rPr lang="en-US" sz="2800" dirty="0">
-                <a:solidFill>
-                  <a:srgbClr val="0070C0"/>
-                </a:solidFill>
-                <a:latin typeface="Calibri" pitchFamily="34" charset="0"/>
-                <a:ea typeface="Calibri" pitchFamily="34" charset="-122"/>
-                <a:cs typeface="Calibri" pitchFamily="34" charset="-120"/>
+              <a:rPr lang="en-US" sz="2000" dirty="0">
+                <a:solidFill>
+                  <a:srgbClr val="2E7A72"/>
+                </a:solidFill>
+                <a:latin typeface="Avenir Next" pitchFamily="34" charset="0"/>
+                <a:ea typeface="Avenir Next" pitchFamily="34" charset="-122"/>
+                <a:cs typeface="Avenir Next" pitchFamily="34" charset="-120"/>
               </a:rPr>
               <a:t>“Move the total to the top.”</a:t>
             </a:r>
-            <a:endParaRPr lang="en-US" sz="2800" dirty="0"/>
+            <a:endParaRPr lang="en-US" sz="2000" dirty="0"/>
           </a:p>
           <a:p>
             <a:pPr algn="l" indent="0" marL="0">
               <a:lnSpc>
-                <a:spcPct val="110000"/>
+                <a:spcPct val="115000"/>
               </a:lnSpc>
               <a:spcAft>
-                <a:spcPts val="1800"/>
+                <a:spcPts val="1600"/>
               </a:spcAft>
               <a:buNone/>
             </a:pPr>
             <a:r>
-              <a:rPr lang="en-US" sz="2800" dirty="0">
-                <a:solidFill>
-                  <a:srgbClr val="0070C0"/>
-                </a:solidFill>
-                <a:latin typeface="Calibri" pitchFamily="34" charset="0"/>
-                <a:ea typeface="Calibri" pitchFamily="34" charset="-122"/>
-                <a:cs typeface="Calibri" pitchFamily="34" charset="-120"/>
+              <a:rPr lang="en-US" sz="2000" dirty="0">
+                <a:solidFill>
+                  <a:srgbClr val="2E7A72"/>
+                </a:solidFill>
+                <a:latin typeface="Avenir Next" pitchFamily="34" charset="0"/>
+                <a:ea typeface="Avenir Next" pitchFamily="34" charset="-122"/>
+                <a:cs typeface="Avenir Next" pitchFamily="34" charset="-120"/>
               </a:rPr>
               <a:t>“Add a pie chart.”</a:t>
             </a:r>
-            <a:endParaRPr lang="en-US" sz="2800" dirty="0"/>
+            <a:endParaRPr lang="en-US" sz="2000" dirty="0"/>
           </a:p>
           <a:p>
             <a:pPr algn="l" indent="0" marL="0">
               <a:lnSpc>
-                <a:spcPct val="110000"/>
+                <a:spcPct val="115000"/>
               </a:lnSpc>
               <a:spcAft>
-                <a:spcPts val="1800"/>
+                <a:spcPts val="1600"/>
               </a:spcAft>
               <a:buNone/>
             </a:pPr>
-            <a:endParaRPr lang="en-US" sz="2800" dirty="0"/>
+            <a:endParaRPr lang="en-US" sz="2000" dirty="0"/>
           </a:p>
           <a:p>
             <a:pPr algn="l" indent="0" marL="0">
               <a:lnSpc>
-                <a:spcPct val="110000"/>
+                <a:spcPct val="115000"/>
               </a:lnSpc>
               <a:spcAft>
-                <a:spcPts val="1800"/>
+                <a:spcPts val="1600"/>
               </a:spcAft>
               <a:buNone/>
             </a:pPr>
             <a:r>
-              <a:rPr lang="en-US" sz="2800" dirty="0">
-                <a:solidFill>
-                  <a:srgbClr val="00B050"/>
-                </a:solidFill>
-                <a:latin typeface="Calibri" pitchFamily="34" charset="0"/>
-                <a:ea typeface="Calibri" pitchFamily="34" charset="-122"/>
-                <a:cs typeface="Calibri" pitchFamily="34" charset="-120"/>
+              <a:rPr lang="en-US" sz="2000" dirty="0">
+                <a:solidFill>
+                  <a:srgbClr val="2E7A72"/>
+                </a:solidFill>
+                <a:latin typeface="Avenir Next" pitchFamily="34" charset="0"/>
+                <a:ea typeface="Avenir Next" pitchFamily="34" charset="-122"/>
+                <a:cs typeface="Avenir Next" pitchFamily="34" charset="-120"/>
               </a:rPr>
               <a:t>No menus. No settings. No code. Just words.</a:t>
             </a:r>
-            <a:endParaRPr lang="en-US" sz="2800" dirty="0"/>
+            <a:endParaRPr lang="en-US" sz="2000" dirty="0"/>
           </a:p>
         </p:txBody>
       </p:sp>
@@ -3115,40 +3159,16 @@
           <a:chExt cx="0" cy="0"/>
         </a:xfrm>
       </p:grpSpPr>
-      <p:pic>
-        <p:nvPicPr>
-          <p:cNvPr id="2" name="Image 0" descr="/Users/batuhangundogdu/Claude Code Workshop/deck/assets/uchicago-footer.png">    </p:cNvPr>
-          <p:cNvPicPr>
-            <a:picLocks noChangeAspect="1"/>
-          </p:cNvPicPr>
-          <p:nvPr/>
-        </p:nvPicPr>
-        <p:blipFill>
-          <a:blip r:embed="rId1"/>
-          <a:stretch>
-            <a:fillRect/>
-          </a:stretch>
-        </p:blipFill>
-        <p:spPr>
-          <a:xfrm>
-            <a:off x="539496" y="6382512"/>
-            <a:ext cx="2843784" cy="475488"/>
-          </a:xfrm>
-          <a:prstGeom prst="rect">
-            <a:avLst/>
-          </a:prstGeom>
-        </p:spPr>
-      </p:pic>
-      <p:sp>
-        <p:nvSpPr>
-          <p:cNvPr id="3" name="Text 0"/>
-          <p:cNvSpPr/>
-          <p:nvPr/>
-        </p:nvSpPr>
-        <p:spPr>
-          <a:xfrm>
-            <a:off x="548640" y="2468880"/>
-            <a:ext cx="11091672" cy="457200"/>
+      <p:sp>
+        <p:nvSpPr>
+          <p:cNvPr id="2" name="Text 0"/>
+          <p:cNvSpPr/>
+          <p:nvPr/>
+        </p:nvSpPr>
+        <p:spPr>
+          <a:xfrm>
+            <a:off x="822960" y="2514600"/>
+            <a:ext cx="10543032" cy="365760"/>
           </a:xfrm>
           <a:prstGeom prst="rect">
             <a:avLst/>
@@ -3164,30 +3184,50 @@
               <a:buNone/>
             </a:pPr>
             <a:r>
-              <a:rPr lang="en-US" sz="2400" spc="200" kern="0" dirty="0">
-                <a:solidFill>
-                  <a:srgbClr val="800000"/>
-                </a:solidFill>
-                <a:latin typeface="Calibri" pitchFamily="34" charset="0"/>
-                <a:ea typeface="Calibri" pitchFamily="34" charset="-122"/>
-                <a:cs typeface="Calibri" pitchFamily="34" charset="-120"/>
+              <a:rPr lang="en-US" sz="1500" b="1" spc="300" kern="0" dirty="0">
+                <a:solidFill>
+                  <a:srgbClr val="2E7A72"/>
+                </a:solidFill>
+                <a:latin typeface="Avenir Next" pitchFamily="34" charset="0"/>
+                <a:ea typeface="Avenir Next" pitchFamily="34" charset="-122"/>
+                <a:cs typeface="Avenir Next" pitchFamily="34" charset="-120"/>
               </a:rPr>
               <a:t>PART THREE</a:t>
             </a:r>
-            <a:endParaRPr lang="en-US" sz="2400" dirty="0"/>
-          </a:p>
-        </p:txBody>
-      </p:sp>
-      <p:sp>
-        <p:nvSpPr>
-          <p:cNvPr id="4" name="Text 1"/>
-          <p:cNvSpPr/>
-          <p:nvPr/>
-        </p:nvSpPr>
-        <p:spPr>
-          <a:xfrm>
-            <a:off x="548640" y="2926080"/>
-            <a:ext cx="11091672" cy="1463040"/>
+            <a:endParaRPr lang="en-US" sz="1500" dirty="0"/>
+          </a:p>
+        </p:txBody>
+      </p:sp>
+      <p:sp>
+        <p:nvSpPr>
+          <p:cNvPr id="3" name="Shape 1"/>
+          <p:cNvSpPr/>
+          <p:nvPr/>
+        </p:nvSpPr>
+        <p:spPr>
+          <a:xfrm>
+            <a:off x="822960" y="2926080"/>
+            <a:ext cx="566928" cy="41148"/>
+          </a:xfrm>
+          <a:prstGeom prst="rect">
+            <a:avLst/>
+          </a:prstGeom>
+          <a:solidFill>
+            <a:srgbClr val="2E7A72"/>
+          </a:solidFill>
+          <a:ln/>
+        </p:spPr>
+      </p:sp>
+      <p:sp>
+        <p:nvSpPr>
+          <p:cNvPr id="4" name="Text 2"/>
+          <p:cNvSpPr/>
+          <p:nvPr/>
+        </p:nvSpPr>
+        <p:spPr>
+          <a:xfrm>
+            <a:off x="822960" y="3108960"/>
+            <a:ext cx="10543032" cy="1463040"/>
           </a:xfrm>
           <a:prstGeom prst="rect">
             <a:avLst/>
@@ -3200,20 +3240,23 @@
           <a:lstStyle/>
           <a:p>
             <a:pPr algn="l" indent="0" marL="0">
-              <a:buNone/>
-            </a:pPr>
-            <a:r>
-              <a:rPr lang="en-US" sz="5000" b="1" dirty="0">
-                <a:solidFill>
-                  <a:srgbClr val="000000"/>
-                </a:solidFill>
-                <a:latin typeface="Calibri" pitchFamily="34" charset="0"/>
-                <a:ea typeface="Calibri" pitchFamily="34" charset="-122"/>
-                <a:cs typeface="Calibri" pitchFamily="34" charset="-120"/>
+              <a:lnSpc>
+                <a:spcPct val="98000"/>
+              </a:lnSpc>
+              <a:buNone/>
+            </a:pPr>
+            <a:r>
+              <a:rPr lang="en-US" sz="4400" b="1" dirty="0">
+                <a:solidFill>
+                  <a:srgbClr val="111111"/>
+                </a:solidFill>
+                <a:latin typeface="Avenir Next" pitchFamily="34" charset="0"/>
+                <a:ea typeface="Avenir Next" pitchFamily="34" charset="-122"/>
+                <a:cs typeface="Avenir Next" pitchFamily="34" charset="-120"/>
               </a:rPr>
               <a:t>The reveal</a:t>
             </a:r>
-            <a:endParaRPr lang="en-US" sz="5000" dirty="0"/>
+            <a:endParaRPr lang="en-US" sz="4400" dirty="0"/>
           </a:p>
         </p:txBody>
       </p:sp>
@@ -3242,40 +3285,16 @@
           <a:chExt cx="0" cy="0"/>
         </a:xfrm>
       </p:grpSpPr>
-      <p:pic>
-        <p:nvPicPr>
-          <p:cNvPr id="2" name="Image 0" descr="/Users/batuhangundogdu/Claude Code Workshop/deck/assets/uchicago-footer.png">    </p:cNvPr>
-          <p:cNvPicPr>
-            <a:picLocks noChangeAspect="1"/>
-          </p:cNvPicPr>
-          <p:nvPr/>
-        </p:nvPicPr>
-        <p:blipFill>
-          <a:blip r:embed="rId1"/>
-          <a:stretch>
-            <a:fillRect/>
-          </a:stretch>
-        </p:blipFill>
-        <p:spPr>
-          <a:xfrm>
-            <a:off x="539496" y="6382512"/>
-            <a:ext cx="2843784" cy="475488"/>
-          </a:xfrm>
-          <a:prstGeom prst="rect">
-            <a:avLst/>
-          </a:prstGeom>
-        </p:spPr>
-      </p:pic>
-      <p:sp>
-        <p:nvSpPr>
-          <p:cNvPr id="3" name="Text 0"/>
-          <p:cNvSpPr/>
-          <p:nvPr/>
-        </p:nvSpPr>
-        <p:spPr>
-          <a:xfrm>
-            <a:off x="548640" y="1554480"/>
-            <a:ext cx="11091672" cy="2743200"/>
+      <p:sp>
+        <p:nvSpPr>
+          <p:cNvPr id="2" name="Text 0"/>
+          <p:cNvSpPr/>
+          <p:nvPr/>
+        </p:nvSpPr>
+        <p:spPr>
+          <a:xfrm>
+            <a:off x="822960" y="658368"/>
+            <a:ext cx="10543032" cy="274320"/>
           </a:xfrm>
           <a:prstGeom prst="rect">
             <a:avLst/>
@@ -3284,6 +3303,65 @@
           <a:ln/>
         </p:spPr>
         <p:txBody>
+          <a:bodyPr wrap="square" lIns="0" tIns="0" rIns="0" bIns="0" rtlCol="0" anchor="t"/>
+          <a:lstStyle/>
+          <a:p>
+            <a:pPr algn="l" indent="0" marL="0">
+              <a:buNone/>
+            </a:pPr>
+            <a:r>
+              <a:rPr lang="en-US" sz="1200" b="1" spc="250" kern="0" dirty="0">
+                <a:solidFill>
+                  <a:srgbClr val="9A9A9A"/>
+                </a:solidFill>
+                <a:latin typeface="Avenir Next" pitchFamily="34" charset="0"/>
+                <a:ea typeface="Avenir Next" pitchFamily="34" charset="-122"/>
+                <a:cs typeface="Avenir Next" pitchFamily="34" charset="-120"/>
+              </a:rPr>
+              <a:t>THE WHOLE THING</a:t>
+            </a:r>
+            <a:endParaRPr lang="en-US" sz="1200" dirty="0"/>
+          </a:p>
+        </p:txBody>
+      </p:sp>
+      <p:sp>
+        <p:nvSpPr>
+          <p:cNvPr id="3" name="Shape 1"/>
+          <p:cNvSpPr/>
+          <p:nvPr/>
+        </p:nvSpPr>
+        <p:spPr>
+          <a:xfrm>
+            <a:off x="822960" y="969264"/>
+            <a:ext cx="566928" cy="41148"/>
+          </a:xfrm>
+          <a:prstGeom prst="rect">
+            <a:avLst/>
+          </a:prstGeom>
+          <a:solidFill>
+            <a:srgbClr val="2E7A72"/>
+          </a:solidFill>
+          <a:ln/>
+        </p:spPr>
+      </p:sp>
+      <p:sp>
+        <p:nvSpPr>
+          <p:cNvPr id="4" name="Text 2"/>
+          <p:cNvSpPr/>
+          <p:nvPr/>
+        </p:nvSpPr>
+        <p:spPr>
+          <a:xfrm>
+            <a:off x="777240" y="1371600"/>
+            <a:ext cx="10543032" cy="2926080"/>
+          </a:xfrm>
+          <a:prstGeom prst="rect">
+            <a:avLst/>
+          </a:prstGeom>
+          <a:noFill/>
+          <a:ln/>
+        </p:spPr>
+        <p:txBody>
           <a:bodyPr wrap="square" lIns="0" tIns="0" rIns="0" bIns="0" rtlCol="0" anchor="ctr"/>
           <a:lstStyle/>
           <a:p>
@@ -3291,30 +3369,30 @@
               <a:buNone/>
             </a:pPr>
             <a:r>
-              <a:rPr lang="en-US" sz="14000" b="1" dirty="0">
-                <a:solidFill>
-                  <a:srgbClr val="800000"/>
-                </a:solidFill>
-                <a:latin typeface="Calibri" pitchFamily="34" charset="0"/>
-                <a:ea typeface="Calibri" pitchFamily="34" charset="-122"/>
-                <a:cs typeface="Calibri" pitchFamily="34" charset="-120"/>
+              <a:rPr lang="en-US" sz="13000" b="1" dirty="0">
+                <a:solidFill>
+                  <a:srgbClr val="2E7A72"/>
+                </a:solidFill>
+                <a:latin typeface="Avenir Next" pitchFamily="34" charset="0"/>
+                <a:ea typeface="Avenir Next" pitchFamily="34" charset="-122"/>
+                <a:cs typeface="Avenir Next" pitchFamily="34" charset="-120"/>
               </a:rPr>
               <a:t>1</a:t>
             </a:r>
-            <a:endParaRPr lang="en-US" sz="14000" dirty="0"/>
-          </a:p>
-        </p:txBody>
-      </p:sp>
-      <p:sp>
-        <p:nvSpPr>
-          <p:cNvPr id="4" name="Text 1"/>
-          <p:cNvSpPr/>
-          <p:nvPr/>
-        </p:nvSpPr>
-        <p:spPr>
-          <a:xfrm>
-            <a:off x="548640" y="4389120"/>
-            <a:ext cx="11091672" cy="914400"/>
+            <a:endParaRPr lang="en-US" sz="13000" dirty="0"/>
+          </a:p>
+        </p:txBody>
+      </p:sp>
+      <p:sp>
+        <p:nvSpPr>
+          <p:cNvPr id="5" name="Text 3"/>
+          <p:cNvSpPr/>
+          <p:nvPr/>
+        </p:nvSpPr>
+        <p:spPr>
+          <a:xfrm>
+            <a:off x="822960" y="4480560"/>
+            <a:ext cx="8714232" cy="1280160"/>
           </a:xfrm>
           <a:prstGeom prst="rect">
             <a:avLst/>
@@ -3327,20 +3405,23 @@
           <a:lstStyle/>
           <a:p>
             <a:pPr algn="l" indent="0" marL="0">
-              <a:buNone/>
-            </a:pPr>
-            <a:r>
-              <a:rPr lang="en-US" sz="2400" dirty="0">
-                <a:solidFill>
-                  <a:srgbClr val="000000"/>
-                </a:solidFill>
-                <a:latin typeface="Calibri" pitchFamily="34" charset="0"/>
-                <a:ea typeface="Calibri" pitchFamily="34" charset="-122"/>
-                <a:cs typeface="Calibri" pitchFamily="34" charset="-120"/>
+              <a:lnSpc>
+                <a:spcPct val="120000"/>
+              </a:lnSpc>
+              <a:buNone/>
+            </a:pPr>
+            <a:r>
+              <a:rPr lang="en-US" sz="1500" dirty="0">
+                <a:solidFill>
+                  <a:srgbClr val="111111"/>
+                </a:solidFill>
+                <a:latin typeface="Avenir Next" pitchFamily="34" charset="0"/>
+                <a:ea typeface="Avenir Next" pitchFamily="34" charset="-122"/>
+                <a:cs typeface="Avenir Next" pitchFamily="34" charset="-120"/>
               </a:rPr>
               <a:t>Claude Code session built this whole workshop - these slides and all four apps. No template. No help. Just conversation.</a:t>
             </a:r>
-            <a:endParaRPr lang="en-US" sz="2400" dirty="0"/>
+            <a:endParaRPr lang="en-US" sz="1500" dirty="0"/>
           </a:p>
         </p:txBody>
       </p:sp>
@@ -3369,40 +3450,16 @@
           <a:chExt cx="0" cy="0"/>
         </a:xfrm>
       </p:grpSpPr>
-      <p:pic>
-        <p:nvPicPr>
-          <p:cNvPr id="2" name="Image 0" descr="/Users/batuhangundogdu/Claude Code Workshop/deck/assets/uchicago-footer.png">    </p:cNvPr>
-          <p:cNvPicPr>
-            <a:picLocks noChangeAspect="1"/>
-          </p:cNvPicPr>
-          <p:nvPr/>
-        </p:nvPicPr>
-        <p:blipFill>
-          <a:blip r:embed="rId1"/>
-          <a:stretch>
-            <a:fillRect/>
-          </a:stretch>
-        </p:blipFill>
-        <p:spPr>
-          <a:xfrm>
-            <a:off x="539496" y="6382512"/>
-            <a:ext cx="2843784" cy="475488"/>
-          </a:xfrm>
-          <a:prstGeom prst="rect">
-            <a:avLst/>
-          </a:prstGeom>
-        </p:spPr>
-      </p:pic>
-      <p:sp>
-        <p:nvSpPr>
-          <p:cNvPr id="3" name="Text 0"/>
-          <p:cNvSpPr/>
-          <p:nvPr/>
-        </p:nvSpPr>
-        <p:spPr>
-          <a:xfrm>
-            <a:off x="548640" y="365760"/>
-            <a:ext cx="11091672" cy="1188720"/>
+      <p:sp>
+        <p:nvSpPr>
+          <p:cNvPr id="2" name="Text 0"/>
+          <p:cNvSpPr/>
+          <p:nvPr/>
+        </p:nvSpPr>
+        <p:spPr>
+          <a:xfrm>
+            <a:off x="822960" y="658368"/>
+            <a:ext cx="10543032" cy="274320"/>
           </a:xfrm>
           <a:prstGeom prst="rect">
             <a:avLst/>
@@ -3418,30 +3475,92 @@
               <a:buNone/>
             </a:pPr>
             <a:r>
-              <a:rPr lang="en-US" sz="5000" b="1" dirty="0">
-                <a:solidFill>
-                  <a:srgbClr val="000000"/>
-                </a:solidFill>
-                <a:latin typeface="Calibri" pitchFamily="34" charset="0"/>
-                <a:ea typeface="Calibri" pitchFamily="34" charset="-122"/>
-                <a:cs typeface="Calibri" pitchFamily="34" charset="-120"/>
+              <a:rPr lang="en-US" sz="1200" b="1" spc="250" kern="0" dirty="0">
+                <a:solidFill>
+                  <a:srgbClr val="9A9A9A"/>
+                </a:solidFill>
+                <a:latin typeface="Avenir Next" pitchFamily="34" charset="0"/>
+                <a:ea typeface="Avenir Next" pitchFamily="34" charset="-122"/>
+                <a:cs typeface="Avenir Next" pitchFamily="34" charset="-120"/>
+              </a:rPr>
+              <a:t>GETTING STARTED</a:t>
+            </a:r>
+            <a:endParaRPr lang="en-US" sz="1200" dirty="0"/>
+          </a:p>
+        </p:txBody>
+      </p:sp>
+      <p:sp>
+        <p:nvSpPr>
+          <p:cNvPr id="3" name="Shape 1"/>
+          <p:cNvSpPr/>
+          <p:nvPr/>
+        </p:nvSpPr>
+        <p:spPr>
+          <a:xfrm>
+            <a:off x="822960" y="969264"/>
+            <a:ext cx="566928" cy="41148"/>
+          </a:xfrm>
+          <a:prstGeom prst="rect">
+            <a:avLst/>
+          </a:prstGeom>
+          <a:solidFill>
+            <a:srgbClr val="2E7A72"/>
+          </a:solidFill>
+          <a:ln/>
+        </p:spPr>
+      </p:sp>
+      <p:sp>
+        <p:nvSpPr>
+          <p:cNvPr id="4" name="Text 2"/>
+          <p:cNvSpPr/>
+          <p:nvPr/>
+        </p:nvSpPr>
+        <p:spPr>
+          <a:xfrm>
+            <a:off x="822960" y="1161288"/>
+            <a:ext cx="10543032" cy="1188720"/>
+          </a:xfrm>
+          <a:prstGeom prst="rect">
+            <a:avLst/>
+          </a:prstGeom>
+          <a:noFill/>
+          <a:ln/>
+        </p:spPr>
+        <p:txBody>
+          <a:bodyPr wrap="square" lIns="0" tIns="0" rIns="0" bIns="0" rtlCol="0" anchor="t"/>
+          <a:lstStyle/>
+          <a:p>
+            <a:pPr algn="l" indent="0" marL="0">
+              <a:lnSpc>
+                <a:spcPct val="98000"/>
+              </a:lnSpc>
+              <a:buNone/>
+            </a:pPr>
+            <a:r>
+              <a:rPr lang="en-US" sz="4000" b="1" dirty="0">
+                <a:solidFill>
+                  <a:srgbClr val="111111"/>
+                </a:solidFill>
+                <a:latin typeface="Avenir Next" pitchFamily="34" charset="0"/>
+                <a:ea typeface="Avenir Next" pitchFamily="34" charset="-122"/>
+                <a:cs typeface="Avenir Next" pitchFamily="34" charset="-120"/>
               </a:rPr>
               <a:t>How you start - Monday morning</a:t>
             </a:r>
-            <a:endParaRPr lang="en-US" sz="5000" dirty="0"/>
-          </a:p>
-        </p:txBody>
-      </p:sp>
-      <p:sp>
-        <p:nvSpPr>
-          <p:cNvPr id="4" name="Text 1"/>
-          <p:cNvSpPr/>
-          <p:nvPr/>
-        </p:nvSpPr>
-        <p:spPr>
-          <a:xfrm>
-            <a:off x="548640" y="1920240"/>
-            <a:ext cx="11091672" cy="4297680"/>
+            <a:endParaRPr lang="en-US" sz="4000" dirty="0"/>
+          </a:p>
+        </p:txBody>
+      </p:sp>
+      <p:sp>
+        <p:nvSpPr>
+          <p:cNvPr id="5" name="Text 3"/>
+          <p:cNvSpPr/>
+          <p:nvPr/>
+        </p:nvSpPr>
+        <p:spPr>
+          <a:xfrm>
+            <a:off x="822960" y="2441448"/>
+            <a:ext cx="10543032" cy="3959352"/>
           </a:xfrm>
           <a:prstGeom prst="rect">
             <a:avLst/>
@@ -3455,106 +3574,106 @@
           <a:p>
             <a:pPr algn="l" indent="0" marL="0">
               <a:lnSpc>
-                <a:spcPct val="110000"/>
+                <a:spcPct val="115000"/>
               </a:lnSpc>
               <a:spcAft>
-                <a:spcPts val="1800"/>
+                <a:spcPts val="1600"/>
               </a:spcAft>
               <a:buNone/>
             </a:pPr>
             <a:r>
-              <a:rPr lang="en-US" sz="2800" dirty="0">
-                <a:solidFill>
-                  <a:srgbClr val="0070C0"/>
-                </a:solidFill>
-                <a:latin typeface="Calibri" pitchFamily="34" charset="0"/>
-                <a:ea typeface="Calibri" pitchFamily="34" charset="-122"/>
-                <a:cs typeface="Calibri" pitchFamily="34" charset="-120"/>
+              <a:rPr lang="en-US" sz="2000" dirty="0">
+                <a:solidFill>
+                  <a:srgbClr val="2E7A72"/>
+                </a:solidFill>
+                <a:latin typeface="Avenir Next" pitchFamily="34" charset="0"/>
+                <a:ea typeface="Avenir Next" pitchFamily="34" charset="-122"/>
+                <a:cs typeface="Avenir Next" pitchFamily="34" charset="-120"/>
               </a:rPr>
               <a:t>Open Claude Code. Type what you wish existed.</a:t>
             </a:r>
-            <a:endParaRPr lang="en-US" sz="2800" dirty="0"/>
+            <a:endParaRPr lang="en-US" sz="2000" dirty="0"/>
           </a:p>
           <a:p>
             <a:pPr algn="l" indent="0" marL="0">
               <a:lnSpc>
-                <a:spcPct val="110000"/>
+                <a:spcPct val="115000"/>
               </a:lnSpc>
               <a:spcAft>
-                <a:spcPts val="1800"/>
+                <a:spcPts val="1600"/>
               </a:spcAft>
               <a:buNone/>
             </a:pPr>
             <a:r>
-              <a:rPr lang="en-US" sz="2800" dirty="0">
-                <a:solidFill>
-                  <a:srgbClr val="000000"/>
-                </a:solidFill>
-                <a:latin typeface="Calibri" pitchFamily="34" charset="0"/>
-                <a:ea typeface="Calibri" pitchFamily="34" charset="-122"/>
-                <a:cs typeface="Calibri" pitchFamily="34" charset="-120"/>
+              <a:rPr lang="en-US" sz="2000" dirty="0">
+                <a:solidFill>
+                  <a:srgbClr val="111111"/>
+                </a:solidFill>
+                <a:latin typeface="Avenir Next" pitchFamily="34" charset="0"/>
+                <a:ea typeface="Avenir Next" pitchFamily="34" charset="-122"/>
+                <a:cs typeface="Avenir Next" pitchFamily="34" charset="-120"/>
               </a:rPr>
               <a:t>Start tiny: a checklist, a tracker, a page.</a:t>
             </a:r>
-            <a:endParaRPr lang="en-US" sz="2800" dirty="0"/>
+            <a:endParaRPr lang="en-US" sz="2000" dirty="0"/>
           </a:p>
           <a:p>
             <a:pPr algn="l" indent="0" marL="0">
               <a:lnSpc>
-                <a:spcPct val="110000"/>
+                <a:spcPct val="115000"/>
               </a:lnSpc>
               <a:spcAft>
-                <a:spcPts val="1800"/>
+                <a:spcPts val="1600"/>
               </a:spcAft>
               <a:buNone/>
             </a:pPr>
             <a:r>
-              <a:rPr lang="en-US" sz="2800" dirty="0">
-                <a:solidFill>
-                  <a:srgbClr val="000000"/>
-                </a:solidFill>
-                <a:latin typeface="Calibri" pitchFamily="34" charset="0"/>
-                <a:ea typeface="Calibri" pitchFamily="34" charset="-122"/>
-                <a:cs typeface="Calibri" pitchFamily="34" charset="-120"/>
+              <a:rPr lang="en-US" sz="2000" dirty="0">
+                <a:solidFill>
+                  <a:srgbClr val="111111"/>
+                </a:solidFill>
+                <a:latin typeface="Avenir Next" pitchFamily="34" charset="0"/>
+                <a:ea typeface="Avenir Next" pitchFamily="34" charset="-122"/>
+                <a:cs typeface="Avenir Next" pitchFamily="34" charset="-120"/>
               </a:rPr>
               <a:t>When it's not quite right, tell it - in plain words.</a:t>
             </a:r>
-            <a:endParaRPr lang="en-US" sz="2800" dirty="0"/>
+            <a:endParaRPr lang="en-US" sz="2000" dirty="0"/>
           </a:p>
           <a:p>
             <a:pPr algn="l" indent="0" marL="0">
               <a:lnSpc>
-                <a:spcPct val="110000"/>
+                <a:spcPct val="115000"/>
               </a:lnSpc>
               <a:spcAft>
-                <a:spcPts val="1800"/>
+                <a:spcPts val="1600"/>
               </a:spcAft>
               <a:buNone/>
             </a:pPr>
-            <a:endParaRPr lang="en-US" sz="2800" dirty="0"/>
+            <a:endParaRPr lang="en-US" sz="2000" dirty="0"/>
           </a:p>
           <a:p>
             <a:pPr algn="l" indent="0" marL="0">
               <a:lnSpc>
-                <a:spcPct val="110000"/>
+                <a:spcPct val="115000"/>
               </a:lnSpc>
               <a:spcAft>
-                <a:spcPts val="1800"/>
+                <a:spcPts val="1600"/>
               </a:spcAft>
               <a:buNone/>
             </a:pPr>
             <a:r>
-              <a:rPr lang="en-US" sz="2800" dirty="0">
-                <a:solidFill>
-                  <a:srgbClr val="800000"/>
-                </a:solidFill>
-                <a:latin typeface="Calibri" pitchFamily="34" charset="0"/>
-                <a:ea typeface="Calibri" pitchFamily="34" charset="-122"/>
-                <a:cs typeface="Calibri" pitchFamily="34" charset="-120"/>
+              <a:rPr lang="en-US" sz="2000" b="1" dirty="0">
+                <a:solidFill>
+                  <a:srgbClr val="111111"/>
+                </a:solidFill>
+                <a:latin typeface="Avenir Next" pitchFamily="34" charset="0"/>
+                <a:ea typeface="Avenir Next" pitchFamily="34" charset="-122"/>
+                <a:cs typeface="Avenir Next" pitchFamily="34" charset="-120"/>
               </a:rPr>
               <a:t>The only skill required is describing what you want.</a:t>
             </a:r>
-            <a:endParaRPr lang="en-US" sz="2800" dirty="0"/>
+            <a:endParaRPr lang="en-US" sz="2000" dirty="0"/>
           </a:p>
         </p:txBody>
       </p:sp>
@@ -3583,40 +3702,16 @@
           <a:chExt cx="0" cy="0"/>
         </a:xfrm>
       </p:grpSpPr>
-      <p:pic>
-        <p:nvPicPr>
-          <p:cNvPr id="2" name="Image 0" descr="/Users/batuhangundogdu/Claude Code Workshop/deck/assets/uchicago-footer.png">    </p:cNvPr>
-          <p:cNvPicPr>
-            <a:picLocks noChangeAspect="1"/>
-          </p:cNvPicPr>
-          <p:nvPr/>
-        </p:nvPicPr>
-        <p:blipFill>
-          <a:blip r:embed="rId1"/>
-          <a:stretch>
-            <a:fillRect/>
-          </a:stretch>
-        </p:blipFill>
-        <p:spPr>
-          <a:xfrm>
-            <a:off x="539496" y="6382512"/>
-            <a:ext cx="2843784" cy="475488"/>
-          </a:xfrm>
-          <a:prstGeom prst="rect">
-            <a:avLst/>
-          </a:prstGeom>
-        </p:spPr>
-      </p:pic>
-      <p:sp>
-        <p:nvSpPr>
-          <p:cNvPr id="3" name="Text 0"/>
-          <p:cNvSpPr/>
-          <p:nvPr/>
-        </p:nvSpPr>
-        <p:spPr>
-          <a:xfrm>
-            <a:off x="548640" y="365760"/>
-            <a:ext cx="11091672" cy="1188720"/>
+      <p:sp>
+        <p:nvSpPr>
+          <p:cNvPr id="2" name="Text 0"/>
+          <p:cNvSpPr/>
+          <p:nvPr/>
+        </p:nvSpPr>
+        <p:spPr>
+          <a:xfrm>
+            <a:off x="822960" y="658368"/>
+            <a:ext cx="10543032" cy="274320"/>
           </a:xfrm>
           <a:prstGeom prst="rect">
             <a:avLst/>
@@ -3632,30 +3727,92 @@
               <a:buNone/>
             </a:pPr>
             <a:r>
-              <a:rPr lang="en-US" sz="5000" b="1" dirty="0">
-                <a:solidFill>
-                  <a:srgbClr val="000000"/>
-                </a:solidFill>
-                <a:latin typeface="Calibri" pitchFamily="34" charset="0"/>
-                <a:ea typeface="Calibri" pitchFamily="34" charset="-122"/>
-                <a:cs typeface="Calibri" pitchFamily="34" charset="-120"/>
+              <a:rPr lang="en-US" sz="1200" b="1" spc="250" kern="0" dirty="0">
+                <a:solidFill>
+                  <a:srgbClr val="9A9A9A"/>
+                </a:solidFill>
+                <a:latin typeface="Avenir Next" pitchFamily="34" charset="0"/>
+                <a:ea typeface="Avenir Next" pitchFamily="34" charset="-122"/>
+                <a:cs typeface="Avenir Next" pitchFamily="34" charset="-120"/>
+              </a:rPr>
+              <a:t>YOUR TURN</a:t>
+            </a:r>
+            <a:endParaRPr lang="en-US" sz="1200" dirty="0"/>
+          </a:p>
+        </p:txBody>
+      </p:sp>
+      <p:sp>
+        <p:nvSpPr>
+          <p:cNvPr id="3" name="Shape 1"/>
+          <p:cNvSpPr/>
+          <p:nvPr/>
+        </p:nvSpPr>
+        <p:spPr>
+          <a:xfrm>
+            <a:off x="822960" y="969264"/>
+            <a:ext cx="566928" cy="41148"/>
+          </a:xfrm>
+          <a:prstGeom prst="rect">
+            <a:avLst/>
+          </a:prstGeom>
+          <a:solidFill>
+            <a:srgbClr val="2E7A72"/>
+          </a:solidFill>
+          <a:ln/>
+        </p:spPr>
+      </p:sp>
+      <p:sp>
+        <p:nvSpPr>
+          <p:cNvPr id="4" name="Text 2"/>
+          <p:cNvSpPr/>
+          <p:nvPr/>
+        </p:nvSpPr>
+        <p:spPr>
+          <a:xfrm>
+            <a:off x="822960" y="1161288"/>
+            <a:ext cx="10543032" cy="1188720"/>
+          </a:xfrm>
+          <a:prstGeom prst="rect">
+            <a:avLst/>
+          </a:prstGeom>
+          <a:noFill/>
+          <a:ln/>
+        </p:spPr>
+        <p:txBody>
+          <a:bodyPr wrap="square" lIns="0" tIns="0" rIns="0" bIns="0" rtlCol="0" anchor="t"/>
+          <a:lstStyle/>
+          <a:p>
+            <a:pPr algn="l" indent="0" marL="0">
+              <a:lnSpc>
+                <a:spcPct val="98000"/>
+              </a:lnSpc>
+              <a:buNone/>
+            </a:pPr>
+            <a:r>
+              <a:rPr lang="en-US" sz="4000" b="1" dirty="0">
+                <a:solidFill>
+                  <a:srgbClr val="111111"/>
+                </a:solidFill>
+                <a:latin typeface="Avenir Next" pitchFamily="34" charset="0"/>
+                <a:ea typeface="Avenir Next" pitchFamily="34" charset="-122"/>
+                <a:cs typeface="Avenir Next" pitchFamily="34" charset="-120"/>
               </a:rPr>
               <a:t>Your turn</a:t>
             </a:r>
-            <a:endParaRPr lang="en-US" sz="5000" dirty="0"/>
-          </a:p>
-        </p:txBody>
-      </p:sp>
-      <p:sp>
-        <p:nvSpPr>
-          <p:cNvPr id="4" name="Text 1"/>
-          <p:cNvSpPr/>
-          <p:nvPr/>
-        </p:nvSpPr>
-        <p:spPr>
-          <a:xfrm>
-            <a:off x="548640" y="1920240"/>
-            <a:ext cx="11091672" cy="4297680"/>
+            <a:endParaRPr lang="en-US" sz="4000" dirty="0"/>
+          </a:p>
+        </p:txBody>
+      </p:sp>
+      <p:sp>
+        <p:nvSpPr>
+          <p:cNvPr id="5" name="Text 3"/>
+          <p:cNvSpPr/>
+          <p:nvPr/>
+        </p:nvSpPr>
+        <p:spPr>
+          <a:xfrm>
+            <a:off x="822960" y="2441448"/>
+            <a:ext cx="10543032" cy="3959352"/>
           </a:xfrm>
           <a:prstGeom prst="rect">
             <a:avLst/>
@@ -3669,83 +3826,83 @@
           <a:p>
             <a:pPr algn="l" indent="0" marL="0">
               <a:lnSpc>
-                <a:spcPct val="110000"/>
+                <a:spcPct val="115000"/>
               </a:lnSpc>
               <a:spcAft>
-                <a:spcPts val="1800"/>
+                <a:spcPts val="1600"/>
               </a:spcAft>
               <a:buNone/>
             </a:pPr>
             <a:r>
-              <a:rPr lang="en-US" sz="2800" dirty="0">
-                <a:solidFill>
-                  <a:srgbClr val="0070C0"/>
-                </a:solidFill>
-                <a:latin typeface="Calibri" pitchFamily="34" charset="0"/>
-                <a:ea typeface="Calibri" pitchFamily="34" charset="-122"/>
-                <a:cs typeface="Calibri" pitchFamily="34" charset="-120"/>
+              <a:rPr lang="en-US" sz="2000" dirty="0">
+                <a:solidFill>
+                  <a:srgbClr val="2E7A72"/>
+                </a:solidFill>
+                <a:latin typeface="Avenir Next" pitchFamily="34" charset="0"/>
+                <a:ea typeface="Avenir Next" pitchFamily="34" charset="-122"/>
+                <a:cs typeface="Avenir Next" pitchFamily="34" charset="-120"/>
               </a:rPr>
               <a:t>Open Claude Code. Describe the thing you wish existed.</a:t>
             </a:r>
-            <a:endParaRPr lang="en-US" sz="2800" dirty="0"/>
+            <a:endParaRPr lang="en-US" sz="2000" dirty="0"/>
           </a:p>
           <a:p>
             <a:pPr algn="l" indent="0" marL="0">
               <a:lnSpc>
-                <a:spcPct val="110000"/>
+                <a:spcPct val="115000"/>
               </a:lnSpc>
               <a:spcAft>
-                <a:spcPts val="1800"/>
+                <a:spcPts val="1600"/>
               </a:spcAft>
               <a:buNone/>
             </a:pPr>
             <a:r>
-              <a:rPr lang="en-US" sz="2800" dirty="0">
-                <a:solidFill>
-                  <a:srgbClr val="000000"/>
-                </a:solidFill>
-                <a:latin typeface="Calibri" pitchFamily="34" charset="0"/>
-                <a:ea typeface="Calibri" pitchFamily="34" charset="-122"/>
-                <a:cs typeface="Calibri" pitchFamily="34" charset="-120"/>
+              <a:rPr lang="en-US" sz="2000" dirty="0">
+                <a:solidFill>
+                  <a:srgbClr val="111111"/>
+                </a:solidFill>
+                <a:latin typeface="Avenir Next" pitchFamily="34" charset="0"/>
+                <a:ea typeface="Avenir Next" pitchFamily="34" charset="-122"/>
+                <a:cs typeface="Avenir Next" pitchFamily="34" charset="-120"/>
               </a:rPr>
               <a:t>You just watched me do it - no code, no template.</a:t>
             </a:r>
-            <a:endParaRPr lang="en-US" sz="2800" dirty="0"/>
+            <a:endParaRPr lang="en-US" sz="2000" dirty="0"/>
           </a:p>
           <a:p>
             <a:pPr algn="l" indent="0" marL="0">
               <a:lnSpc>
-                <a:spcPct val="110000"/>
+                <a:spcPct val="115000"/>
               </a:lnSpc>
               <a:spcAft>
-                <a:spcPts val="1800"/>
+                <a:spcPts val="1600"/>
               </a:spcAft>
               <a:buNone/>
             </a:pPr>
-            <a:endParaRPr lang="en-US" sz="2800" dirty="0"/>
+            <a:endParaRPr lang="en-US" sz="2000" dirty="0"/>
           </a:p>
           <a:p>
             <a:pPr algn="l" indent="0" marL="0">
               <a:lnSpc>
-                <a:spcPct val="110000"/>
+                <a:spcPct val="115000"/>
               </a:lnSpc>
               <a:spcAft>
-                <a:spcPts val="1800"/>
+                <a:spcPts val="1600"/>
               </a:spcAft>
               <a:buNone/>
             </a:pPr>
             <a:r>
-              <a:rPr lang="en-US" sz="2800" dirty="0">
-                <a:solidFill>
-                  <a:srgbClr val="00B050"/>
-                </a:solidFill>
-                <a:latin typeface="Calibri" pitchFamily="34" charset="0"/>
-                <a:ea typeface="Calibri" pitchFamily="34" charset="-122"/>
-                <a:cs typeface="Calibri" pitchFamily="34" charset="-120"/>
+              <a:rPr lang="en-US" sz="2000" dirty="0">
+                <a:solidFill>
+                  <a:srgbClr val="2E7A72"/>
+                </a:solidFill>
+                <a:latin typeface="Avenir Next" pitchFamily="34" charset="0"/>
+                <a:ea typeface="Avenir Next" pitchFamily="34" charset="-122"/>
+                <a:cs typeface="Avenir Next" pitchFamily="34" charset="-120"/>
               </a:rPr>
               <a:t>Go build something you wished existed.</a:t>
             </a:r>
-            <a:endParaRPr lang="en-US" sz="2800" dirty="0"/>
+            <a:endParaRPr lang="en-US" sz="2000" dirty="0"/>
           </a:p>
         </p:txBody>
       </p:sp>
@@ -3774,40 +3931,16 @@
           <a:chExt cx="0" cy="0"/>
         </a:xfrm>
       </p:grpSpPr>
-      <p:pic>
-        <p:nvPicPr>
-          <p:cNvPr id="2" name="Image 0" descr="/Users/batuhangundogdu/Claude Code Workshop/deck/assets/uchicago-footer.png">    </p:cNvPr>
-          <p:cNvPicPr>
-            <a:picLocks noChangeAspect="1"/>
-          </p:cNvPicPr>
-          <p:nvPr/>
-        </p:nvPicPr>
-        <p:blipFill>
-          <a:blip r:embed="rId1"/>
-          <a:stretch>
-            <a:fillRect/>
-          </a:stretch>
-        </p:blipFill>
-        <p:spPr>
-          <a:xfrm>
-            <a:off x="539496" y="6382512"/>
-            <a:ext cx="2843784" cy="475488"/>
-          </a:xfrm>
-          <a:prstGeom prst="rect">
-            <a:avLst/>
-          </a:prstGeom>
-        </p:spPr>
-      </p:pic>
-      <p:sp>
-        <p:nvSpPr>
-          <p:cNvPr id="3" name="Text 0"/>
-          <p:cNvSpPr/>
-          <p:nvPr/>
-        </p:nvSpPr>
-        <p:spPr>
-          <a:xfrm>
-            <a:off x="548640" y="365760"/>
-            <a:ext cx="11091672" cy="1188720"/>
+      <p:sp>
+        <p:nvSpPr>
+          <p:cNvPr id="2" name="Text 0"/>
+          <p:cNvSpPr/>
+          <p:nvPr/>
+        </p:nvSpPr>
+        <p:spPr>
+          <a:xfrm>
+            <a:off x="822960" y="658368"/>
+            <a:ext cx="10543032" cy="274320"/>
           </a:xfrm>
           <a:prstGeom prst="rect">
             <a:avLst/>
@@ -3823,30 +3956,92 @@
               <a:buNone/>
             </a:pPr>
             <a:r>
-              <a:rPr lang="en-US" sz="5000" b="1" dirty="0">
-                <a:solidFill>
-                  <a:srgbClr val="000000"/>
-                </a:solidFill>
-                <a:latin typeface="Calibri" pitchFamily="34" charset="0"/>
-                <a:ea typeface="Calibri" pitchFamily="34" charset="-122"/>
-                <a:cs typeface="Calibri" pitchFamily="34" charset="-120"/>
+              <a:rPr lang="en-US" sz="1200" b="1" spc="250" kern="0" dirty="0">
+                <a:solidFill>
+                  <a:srgbClr val="9A9A9A"/>
+                </a:solidFill>
+                <a:latin typeface="Avenir Next" pitchFamily="34" charset="0"/>
+                <a:ea typeface="Avenir Next" pitchFamily="34" charset="-122"/>
+                <a:cs typeface="Avenir Next" pitchFamily="34" charset="-120"/>
+              </a:rPr>
+              <a:t>WARM-UP POLL</a:t>
+            </a:r>
+            <a:endParaRPr lang="en-US" sz="1200" dirty="0"/>
+          </a:p>
+        </p:txBody>
+      </p:sp>
+      <p:sp>
+        <p:nvSpPr>
+          <p:cNvPr id="3" name="Shape 1"/>
+          <p:cNvSpPr/>
+          <p:nvPr/>
+        </p:nvSpPr>
+        <p:spPr>
+          <a:xfrm>
+            <a:off x="822960" y="969264"/>
+            <a:ext cx="566928" cy="41148"/>
+          </a:xfrm>
+          <a:prstGeom prst="rect">
+            <a:avLst/>
+          </a:prstGeom>
+          <a:solidFill>
+            <a:srgbClr val="2E7A72"/>
+          </a:solidFill>
+          <a:ln/>
+        </p:spPr>
+      </p:sp>
+      <p:sp>
+        <p:nvSpPr>
+          <p:cNvPr id="4" name="Text 2"/>
+          <p:cNvSpPr/>
+          <p:nvPr/>
+        </p:nvSpPr>
+        <p:spPr>
+          <a:xfrm>
+            <a:off x="822960" y="1161288"/>
+            <a:ext cx="10543032" cy="1188720"/>
+          </a:xfrm>
+          <a:prstGeom prst="rect">
+            <a:avLst/>
+          </a:prstGeom>
+          <a:noFill/>
+          <a:ln/>
+        </p:spPr>
+        <p:txBody>
+          <a:bodyPr wrap="square" lIns="0" tIns="0" rIns="0" bIns="0" rtlCol="0" anchor="t"/>
+          <a:lstStyle/>
+          <a:p>
+            <a:pPr algn="l" indent="0" marL="0">
+              <a:lnSpc>
+                <a:spcPct val="98000"/>
+              </a:lnSpc>
+              <a:buNone/>
+            </a:pPr>
+            <a:r>
+              <a:rPr lang="en-US" sz="4000" b="1" dirty="0">
+                <a:solidFill>
+                  <a:srgbClr val="111111"/>
+                </a:solidFill>
+                <a:latin typeface="Avenir Next" pitchFamily="34" charset="0"/>
+                <a:ea typeface="Avenir Next" pitchFamily="34" charset="-122"/>
+                <a:cs typeface="Avenir Next" pitchFamily="34" charset="-120"/>
               </a:rPr>
               <a:t>First - who's in the room?</a:t>
             </a:r>
-            <a:endParaRPr lang="en-US" sz="5000" dirty="0"/>
-          </a:p>
-        </p:txBody>
-      </p:sp>
-      <p:sp>
-        <p:nvSpPr>
-          <p:cNvPr id="4" name="Text 1"/>
-          <p:cNvSpPr/>
-          <p:nvPr/>
-        </p:nvSpPr>
-        <p:spPr>
-          <a:xfrm>
-            <a:off x="548640" y="1920240"/>
-            <a:ext cx="11091672" cy="4297680"/>
+            <a:endParaRPr lang="en-US" sz="4000" dirty="0"/>
+          </a:p>
+        </p:txBody>
+      </p:sp>
+      <p:sp>
+        <p:nvSpPr>
+          <p:cNvPr id="5" name="Text 3"/>
+          <p:cNvSpPr/>
+          <p:nvPr/>
+        </p:nvSpPr>
+        <p:spPr>
+          <a:xfrm>
+            <a:off x="822960" y="2441448"/>
+            <a:ext cx="10543032" cy="3959352"/>
           </a:xfrm>
           <a:prstGeom prst="rect">
             <a:avLst/>
@@ -3860,106 +4055,106 @@
           <a:p>
             <a:pPr algn="l" indent="0" marL="0">
               <a:lnSpc>
-                <a:spcPct val="110000"/>
+                <a:spcPct val="115000"/>
               </a:lnSpc>
               <a:spcAft>
-                <a:spcPts val="1800"/>
+                <a:spcPts val="1600"/>
               </a:spcAft>
               <a:buNone/>
             </a:pPr>
             <a:r>
-              <a:rPr lang="en-US" sz="2800" dirty="0">
-                <a:solidFill>
-                  <a:srgbClr val="800000"/>
-                </a:solidFill>
-                <a:latin typeface="Calibri" pitchFamily="34" charset="0"/>
-                <a:ea typeface="Calibri" pitchFamily="34" charset="-122"/>
-                <a:cs typeface="Calibri" pitchFamily="34" charset="-120"/>
+              <a:rPr lang="en-US" sz="2000" b="1" dirty="0">
+                <a:solidFill>
+                  <a:srgbClr val="111111"/>
+                </a:solidFill>
+                <a:latin typeface="Avenir Next" pitchFamily="34" charset="0"/>
+                <a:ea typeface="Avenir Next" pitchFamily="34" charset="-122"/>
+                <a:cs typeface="Avenir Next" pitchFamily="34" charset="-120"/>
               </a:rPr>
               <a:t>Scan the QR and pick one.  [ Poll Everywhere QR - top right ]</a:t>
             </a:r>
-            <a:endParaRPr lang="en-US" sz="2800" dirty="0"/>
+            <a:endParaRPr lang="en-US" sz="2000" dirty="0"/>
           </a:p>
           <a:p>
             <a:pPr algn="l" indent="0" marL="0">
               <a:lnSpc>
-                <a:spcPct val="110000"/>
+                <a:spcPct val="115000"/>
               </a:lnSpc>
               <a:spcAft>
-                <a:spcPts val="1800"/>
+                <a:spcPts val="1600"/>
               </a:spcAft>
               <a:buNone/>
             </a:pPr>
-            <a:endParaRPr lang="en-US" sz="2800" dirty="0"/>
+            <a:endParaRPr lang="en-US" sz="2000" dirty="0"/>
           </a:p>
           <a:p>
             <a:pPr algn="l" indent="0" marL="0">
               <a:lnSpc>
-                <a:spcPct val="110000"/>
+                <a:spcPct val="115000"/>
               </a:lnSpc>
               <a:spcAft>
-                <a:spcPts val="1800"/>
+                <a:spcPts val="1600"/>
               </a:spcAft>
               <a:buNone/>
             </a:pPr>
             <a:r>
-              <a:rPr lang="en-US" sz="2800" dirty="0">
-                <a:solidFill>
-                  <a:srgbClr val="00B050"/>
-                </a:solidFill>
-                <a:latin typeface="Calibri" pitchFamily="34" charset="0"/>
-                <a:ea typeface="Calibri" pitchFamily="34" charset="-122"/>
-                <a:cs typeface="Calibri" pitchFamily="34" charset="-120"/>
+              <a:rPr lang="en-US" sz="2000" dirty="0">
+                <a:solidFill>
+                  <a:srgbClr val="2E7A72"/>
+                </a:solidFill>
+                <a:latin typeface="Avenir Next" pitchFamily="34" charset="0"/>
+                <a:ea typeface="Avenir Next" pitchFamily="34" charset="-122"/>
+                <a:cs typeface="Avenir Next" pitchFamily="34" charset="-120"/>
               </a:rPr>
               <a:t>1 · I already use it every day - here to see what else it can do.</a:t>
             </a:r>
-            <a:endParaRPr lang="en-US" sz="2800" dirty="0"/>
+            <a:endParaRPr lang="en-US" sz="2000" dirty="0"/>
           </a:p>
           <a:p>
             <a:pPr algn="l" indent="0" marL="0">
               <a:lnSpc>
-                <a:spcPct val="110000"/>
+                <a:spcPct val="115000"/>
               </a:lnSpc>
               <a:spcAft>
-                <a:spcPts val="1800"/>
+                <a:spcPts val="1600"/>
               </a:spcAft>
               <a:buNone/>
             </a:pPr>
             <a:r>
-              <a:rPr lang="en-US" sz="2800" dirty="0">
-                <a:solidFill>
-                  <a:srgbClr val="0070C0"/>
-                </a:solidFill>
-                <a:latin typeface="Calibri" pitchFamily="34" charset="0"/>
-                <a:ea typeface="Calibri" pitchFamily="34" charset="-122"/>
-                <a:cs typeface="Calibri" pitchFamily="34" charset="-120"/>
+              <a:rPr lang="en-US" sz="2000" dirty="0">
+                <a:solidFill>
+                  <a:srgbClr val="2E7A72"/>
+                </a:solidFill>
+                <a:latin typeface="Avenir Next" pitchFamily="34" charset="0"/>
+                <a:ea typeface="Avenir Next" pitchFamily="34" charset="-122"/>
+                <a:cs typeface="Avenir Next" pitchFamily="34" charset="-120"/>
               </a:rPr>
               <a:t>2 · I don't know much - having my FOMO right now.</a:t>
             </a:r>
-            <a:endParaRPr lang="en-US" sz="2800" dirty="0"/>
+            <a:endParaRPr lang="en-US" sz="2000" dirty="0"/>
           </a:p>
           <a:p>
             <a:pPr algn="l" indent="0" marL="0">
               <a:lnSpc>
-                <a:spcPct val="110000"/>
+                <a:spcPct val="115000"/>
               </a:lnSpc>
               <a:spcAft>
-                <a:spcPts val="1800"/>
+                <a:spcPts val="1600"/>
               </a:spcAft>
               <a:buNone/>
             </a:pPr>
             <a:r>
-              <a:rPr lang="en-US" sz="2800" dirty="0">
-                <a:solidFill>
-                  <a:srgbClr val="000000"/>
-                </a:solidFill>
-                <a:latin typeface="Calibri" pitchFamily="34" charset="0"/>
-                <a:ea typeface="Calibri" pitchFamily="34" charset="-122"/>
-                <a:cs typeface="Calibri" pitchFamily="34" charset="-120"/>
+              <a:rPr lang="en-US" sz="2000" dirty="0">
+                <a:solidFill>
+                  <a:srgbClr val="111111"/>
+                </a:solidFill>
+                <a:latin typeface="Avenir Next" pitchFamily="34" charset="0"/>
+                <a:ea typeface="Avenir Next" pitchFamily="34" charset="-122"/>
+                <a:cs typeface="Avenir Next" pitchFamily="34" charset="-120"/>
               </a:rPr>
               <a:t>3 · I'm a skeptic - don't think much of it, but here I am anyway.</a:t>
             </a:r>
-            <a:endParaRPr lang="en-US" sz="2800" dirty="0"/>
+            <a:endParaRPr lang="en-US" sz="2000" dirty="0"/>
           </a:p>
         </p:txBody>
       </p:sp>
@@ -3988,40 +4183,16 @@
           <a:chExt cx="0" cy="0"/>
         </a:xfrm>
       </p:grpSpPr>
-      <p:pic>
-        <p:nvPicPr>
-          <p:cNvPr id="2" name="Image 0" descr="/Users/batuhangundogdu/Claude Code Workshop/deck/assets/uchicago-footer.png">    </p:cNvPr>
-          <p:cNvPicPr>
-            <a:picLocks noChangeAspect="1"/>
-          </p:cNvPicPr>
-          <p:nvPr/>
-        </p:nvPicPr>
-        <p:blipFill>
-          <a:blip r:embed="rId1"/>
-          <a:stretch>
-            <a:fillRect/>
-          </a:stretch>
-        </p:blipFill>
-        <p:spPr>
-          <a:xfrm>
-            <a:off x="539496" y="6382512"/>
-            <a:ext cx="2843784" cy="475488"/>
-          </a:xfrm>
-          <a:prstGeom prst="rect">
-            <a:avLst/>
-          </a:prstGeom>
-        </p:spPr>
-      </p:pic>
-      <p:sp>
-        <p:nvSpPr>
-          <p:cNvPr id="3" name="Text 0"/>
-          <p:cNvSpPr/>
-          <p:nvPr/>
-        </p:nvSpPr>
-        <p:spPr>
-          <a:xfrm>
-            <a:off x="548640" y="2468880"/>
-            <a:ext cx="11091672" cy="457200"/>
+      <p:sp>
+        <p:nvSpPr>
+          <p:cNvPr id="2" name="Text 0"/>
+          <p:cNvSpPr/>
+          <p:nvPr/>
+        </p:nvSpPr>
+        <p:spPr>
+          <a:xfrm>
+            <a:off x="822960" y="2514600"/>
+            <a:ext cx="10543032" cy="365760"/>
           </a:xfrm>
           <a:prstGeom prst="rect">
             <a:avLst/>
@@ -4037,30 +4208,50 @@
               <a:buNone/>
             </a:pPr>
             <a:r>
-              <a:rPr lang="en-US" sz="2400" spc="200" kern="0" dirty="0">
-                <a:solidFill>
-                  <a:srgbClr val="800000"/>
-                </a:solidFill>
-                <a:latin typeface="Calibri" pitchFamily="34" charset="0"/>
-                <a:ea typeface="Calibri" pitchFamily="34" charset="-122"/>
-                <a:cs typeface="Calibri" pitchFamily="34" charset="-120"/>
+              <a:rPr lang="en-US" sz="1500" b="1" spc="300" kern="0" dirty="0">
+                <a:solidFill>
+                  <a:srgbClr val="2E7A72"/>
+                </a:solidFill>
+                <a:latin typeface="Avenir Next" pitchFamily="34" charset="0"/>
+                <a:ea typeface="Avenir Next" pitchFamily="34" charset="-122"/>
+                <a:cs typeface="Avenir Next" pitchFamily="34" charset="-120"/>
               </a:rPr>
               <a:t>PART ONE</a:t>
             </a:r>
-            <a:endParaRPr lang="en-US" sz="2400" dirty="0"/>
-          </a:p>
-        </p:txBody>
-      </p:sp>
-      <p:sp>
-        <p:nvSpPr>
-          <p:cNvPr id="4" name="Text 1"/>
-          <p:cNvSpPr/>
-          <p:nvPr/>
-        </p:nvSpPr>
-        <p:spPr>
-          <a:xfrm>
-            <a:off x="548640" y="2926080"/>
-            <a:ext cx="11091672" cy="1463040"/>
+            <a:endParaRPr lang="en-US" sz="1500" dirty="0"/>
+          </a:p>
+        </p:txBody>
+      </p:sp>
+      <p:sp>
+        <p:nvSpPr>
+          <p:cNvPr id="3" name="Shape 1"/>
+          <p:cNvSpPr/>
+          <p:nvPr/>
+        </p:nvSpPr>
+        <p:spPr>
+          <a:xfrm>
+            <a:off x="822960" y="2926080"/>
+            <a:ext cx="566928" cy="41148"/>
+          </a:xfrm>
+          <a:prstGeom prst="rect">
+            <a:avLst/>
+          </a:prstGeom>
+          <a:solidFill>
+            <a:srgbClr val="2E7A72"/>
+          </a:solidFill>
+          <a:ln/>
+        </p:spPr>
+      </p:sp>
+      <p:sp>
+        <p:nvSpPr>
+          <p:cNvPr id="4" name="Text 2"/>
+          <p:cNvSpPr/>
+          <p:nvPr/>
+        </p:nvSpPr>
+        <p:spPr>
+          <a:xfrm>
+            <a:off x="822960" y="3108960"/>
+            <a:ext cx="10543032" cy="1463040"/>
           </a:xfrm>
           <a:prstGeom prst="rect">
             <a:avLst/>
@@ -4073,20 +4264,23 @@
           <a:lstStyle/>
           <a:p>
             <a:pPr algn="l" indent="0" marL="0">
-              <a:buNone/>
-            </a:pPr>
-            <a:r>
-              <a:rPr lang="en-US" sz="5000" b="1" dirty="0">
-                <a:solidFill>
-                  <a:srgbClr val="000000"/>
-                </a:solidFill>
-                <a:latin typeface="Calibri" pitchFamily="34" charset="0"/>
-                <a:ea typeface="Calibri" pitchFamily="34" charset="-122"/>
-                <a:cs typeface="Calibri" pitchFamily="34" charset="-120"/>
+              <a:lnSpc>
+                <a:spcPct val="98000"/>
+              </a:lnSpc>
+              <a:buNone/>
+            </a:pPr>
+            <a:r>
+              <a:rPr lang="en-US" sz="4400" b="1" dirty="0">
+                <a:solidFill>
+                  <a:srgbClr val="111111"/>
+                </a:solidFill>
+                <a:latin typeface="Avenir Next" pitchFamily="34" charset="0"/>
+                <a:ea typeface="Avenir Next" pitchFamily="34" charset="-122"/>
+                <a:cs typeface="Avenir Next" pitchFamily="34" charset="-120"/>
               </a:rPr>
               <a:t>The one big idea</a:t>
             </a:r>
-            <a:endParaRPr lang="en-US" sz="5000" dirty="0"/>
+            <a:endParaRPr lang="en-US" sz="4400" dirty="0"/>
           </a:p>
         </p:txBody>
       </p:sp>
@@ -4115,40 +4309,16 @@
           <a:chExt cx="0" cy="0"/>
         </a:xfrm>
       </p:grpSpPr>
-      <p:pic>
-        <p:nvPicPr>
-          <p:cNvPr id="2" name="Image 0" descr="/Users/batuhangundogdu/Claude Code Workshop/deck/assets/uchicago-footer.png">    </p:cNvPr>
-          <p:cNvPicPr>
-            <a:picLocks noChangeAspect="1"/>
-          </p:cNvPicPr>
-          <p:nvPr/>
-        </p:nvPicPr>
-        <p:blipFill>
-          <a:blip r:embed="rId1"/>
-          <a:stretch>
-            <a:fillRect/>
-          </a:stretch>
-        </p:blipFill>
-        <p:spPr>
-          <a:xfrm>
-            <a:off x="539496" y="6382512"/>
-            <a:ext cx="2843784" cy="475488"/>
-          </a:xfrm>
-          <a:prstGeom prst="rect">
-            <a:avLst/>
-          </a:prstGeom>
-        </p:spPr>
-      </p:pic>
-      <p:sp>
-        <p:nvSpPr>
-          <p:cNvPr id="3" name="Text 0"/>
-          <p:cNvSpPr/>
-          <p:nvPr/>
-        </p:nvSpPr>
-        <p:spPr>
-          <a:xfrm>
-            <a:off x="548640" y="365760"/>
-            <a:ext cx="11091672" cy="1188720"/>
+      <p:sp>
+        <p:nvSpPr>
+          <p:cNvPr id="2" name="Text 0"/>
+          <p:cNvSpPr/>
+          <p:nvPr/>
+        </p:nvSpPr>
+        <p:spPr>
+          <a:xfrm>
+            <a:off x="822960" y="658368"/>
+            <a:ext cx="10543032" cy="274320"/>
           </a:xfrm>
           <a:prstGeom prst="rect">
             <a:avLst/>
@@ -4164,30 +4334,92 @@
               <a:buNone/>
             </a:pPr>
             <a:r>
-              <a:rPr lang="en-US" sz="5000" b="1" dirty="0">
-                <a:solidFill>
-                  <a:srgbClr val="000000"/>
-                </a:solidFill>
-                <a:latin typeface="Calibri" pitchFamily="34" charset="0"/>
-                <a:ea typeface="Calibri" pitchFamily="34" charset="-122"/>
-                <a:cs typeface="Calibri" pitchFamily="34" charset="-120"/>
+              <a:rPr lang="en-US" sz="1200" b="1" spc="250" kern="0" dirty="0">
+                <a:solidFill>
+                  <a:srgbClr val="9A9A9A"/>
+                </a:solidFill>
+                <a:latin typeface="Avenir Next" pitchFamily="34" charset="0"/>
+                <a:ea typeface="Avenir Next" pitchFamily="34" charset="-122"/>
+                <a:cs typeface="Avenir Next" pitchFamily="34" charset="-120"/>
+              </a:rPr>
+              <a:t>THE BIG IDEA</a:t>
+            </a:r>
+            <a:endParaRPr lang="en-US" sz="1200" dirty="0"/>
+          </a:p>
+        </p:txBody>
+      </p:sp>
+      <p:sp>
+        <p:nvSpPr>
+          <p:cNvPr id="3" name="Shape 1"/>
+          <p:cNvSpPr/>
+          <p:nvPr/>
+        </p:nvSpPr>
+        <p:spPr>
+          <a:xfrm>
+            <a:off x="822960" y="969264"/>
+            <a:ext cx="566928" cy="41148"/>
+          </a:xfrm>
+          <a:prstGeom prst="rect">
+            <a:avLst/>
+          </a:prstGeom>
+          <a:solidFill>
+            <a:srgbClr val="2E7A72"/>
+          </a:solidFill>
+          <a:ln/>
+        </p:spPr>
+      </p:sp>
+      <p:sp>
+        <p:nvSpPr>
+          <p:cNvPr id="4" name="Text 2"/>
+          <p:cNvSpPr/>
+          <p:nvPr/>
+        </p:nvSpPr>
+        <p:spPr>
+          <a:xfrm>
+            <a:off x="822960" y="1161288"/>
+            <a:ext cx="10543032" cy="1188720"/>
+          </a:xfrm>
+          <a:prstGeom prst="rect">
+            <a:avLst/>
+          </a:prstGeom>
+          <a:noFill/>
+          <a:ln/>
+        </p:spPr>
+        <p:txBody>
+          <a:bodyPr wrap="square" lIns="0" tIns="0" rIns="0" bIns="0" rtlCol="0" anchor="t"/>
+          <a:lstStyle/>
+          <a:p>
+            <a:pPr algn="l" indent="0" marL="0">
+              <a:lnSpc>
+                <a:spcPct val="98000"/>
+              </a:lnSpc>
+              <a:buNone/>
+            </a:pPr>
+            <a:r>
+              <a:rPr lang="en-US" sz="4000" b="1" dirty="0">
+                <a:solidFill>
+                  <a:srgbClr val="111111"/>
+                </a:solidFill>
+                <a:latin typeface="Avenir Next" pitchFamily="34" charset="0"/>
+                <a:ea typeface="Avenir Next" pitchFamily="34" charset="-122"/>
+                <a:cs typeface="Avenir Next" pitchFamily="34" charset="-120"/>
               </a:rPr>
               <a:t>It's not a coding tool. It's a conversation.</a:t>
             </a:r>
-            <a:endParaRPr lang="en-US" sz="5000" dirty="0"/>
-          </a:p>
-        </p:txBody>
-      </p:sp>
-      <p:sp>
-        <p:nvSpPr>
-          <p:cNvPr id="4" name="Text 1"/>
-          <p:cNvSpPr/>
-          <p:nvPr/>
-        </p:nvSpPr>
-        <p:spPr>
-          <a:xfrm>
-            <a:off x="548640" y="1920240"/>
-            <a:ext cx="11091672" cy="4297680"/>
+            <a:endParaRPr lang="en-US" sz="4000" dirty="0"/>
+          </a:p>
+        </p:txBody>
+      </p:sp>
+      <p:sp>
+        <p:nvSpPr>
+          <p:cNvPr id="5" name="Text 3"/>
+          <p:cNvSpPr/>
+          <p:nvPr/>
+        </p:nvSpPr>
+        <p:spPr>
+          <a:xfrm>
+            <a:off x="822960" y="2441448"/>
+            <a:ext cx="10543032" cy="3959352"/>
           </a:xfrm>
           <a:prstGeom prst="rect">
             <a:avLst/>
@@ -4201,106 +4433,106 @@
           <a:p>
             <a:pPr algn="l" indent="0" marL="0">
               <a:lnSpc>
-                <a:spcPct val="110000"/>
+                <a:spcPct val="115000"/>
               </a:lnSpc>
               <a:spcAft>
-                <a:spcPts val="1800"/>
+                <a:spcPts val="1600"/>
               </a:spcAft>
               <a:buNone/>
             </a:pPr>
             <a:r>
-              <a:rPr lang="en-US" sz="2800" dirty="0">
-                <a:solidFill>
-                  <a:srgbClr val="0070C0"/>
-                </a:solidFill>
-                <a:latin typeface="Calibri" pitchFamily="34" charset="0"/>
-                <a:ea typeface="Calibri" pitchFamily="34" charset="-122"/>
-                <a:cs typeface="Calibri" pitchFamily="34" charset="-120"/>
+              <a:rPr lang="en-US" sz="2000" dirty="0">
+                <a:solidFill>
+                  <a:srgbClr val="2E7A72"/>
+                </a:solidFill>
+                <a:latin typeface="Avenir Next" pitchFamily="34" charset="0"/>
+                <a:ea typeface="Avenir Next" pitchFamily="34" charset="-122"/>
+                <a:cs typeface="Avenir Next" pitchFamily="34" charset="-120"/>
               </a:rPr>
               <a:t>You describe what you want, in plain English.</a:t>
             </a:r>
-            <a:endParaRPr lang="en-US" sz="2800" dirty="0"/>
+            <a:endParaRPr lang="en-US" sz="2000" dirty="0"/>
           </a:p>
           <a:p>
             <a:pPr algn="l" indent="0" marL="0">
               <a:lnSpc>
-                <a:spcPct val="110000"/>
+                <a:spcPct val="115000"/>
               </a:lnSpc>
               <a:spcAft>
-                <a:spcPts val="1800"/>
+                <a:spcPts val="1600"/>
               </a:spcAft>
               <a:buNone/>
             </a:pPr>
             <a:r>
-              <a:rPr lang="en-US" sz="2800" dirty="0">
-                <a:solidFill>
-                  <a:srgbClr val="000000"/>
-                </a:solidFill>
-                <a:latin typeface="Calibri" pitchFamily="34" charset="0"/>
-                <a:ea typeface="Calibri" pitchFamily="34" charset="-122"/>
-                <a:cs typeface="Calibri" pitchFamily="34" charset="-120"/>
+              <a:rPr lang="en-US" sz="2000" dirty="0">
+                <a:solidFill>
+                  <a:srgbClr val="111111"/>
+                </a:solidFill>
+                <a:latin typeface="Avenir Next" pitchFamily="34" charset="0"/>
+                <a:ea typeface="Avenir Next" pitchFamily="34" charset="-122"/>
+                <a:cs typeface="Avenir Next" pitchFamily="34" charset="-120"/>
               </a:rPr>
               <a:t>It builds the thing - a page, a tracker, a tool.</a:t>
             </a:r>
-            <a:endParaRPr lang="en-US" sz="2800" dirty="0"/>
+            <a:endParaRPr lang="en-US" sz="2000" dirty="0"/>
           </a:p>
           <a:p>
             <a:pPr algn="l" indent="0" marL="0">
               <a:lnSpc>
-                <a:spcPct val="110000"/>
+                <a:spcPct val="115000"/>
               </a:lnSpc>
               <a:spcAft>
-                <a:spcPts val="1800"/>
+                <a:spcPts val="1600"/>
               </a:spcAft>
               <a:buNone/>
             </a:pPr>
             <a:r>
-              <a:rPr lang="en-US" sz="2800" dirty="0">
-                <a:solidFill>
-                  <a:srgbClr val="00B050"/>
-                </a:solidFill>
-                <a:latin typeface="Calibri" pitchFamily="34" charset="0"/>
-                <a:ea typeface="Calibri" pitchFamily="34" charset="-122"/>
-                <a:cs typeface="Calibri" pitchFamily="34" charset="-120"/>
+              <a:rPr lang="en-US" sz="2000" dirty="0">
+                <a:solidFill>
+                  <a:srgbClr val="2E7A72"/>
+                </a:solidFill>
+                <a:latin typeface="Avenir Next" pitchFamily="34" charset="0"/>
+                <a:ea typeface="Avenir Next" pitchFamily="34" charset="-122"/>
+                <a:cs typeface="Avenir Next" pitchFamily="34" charset="-120"/>
               </a:rPr>
               <a:t>You want it different? You just say so.</a:t>
             </a:r>
-            <a:endParaRPr lang="en-US" sz="2800" dirty="0"/>
+            <a:endParaRPr lang="en-US" sz="2000" dirty="0"/>
           </a:p>
           <a:p>
             <a:pPr algn="l" indent="0" marL="0">
               <a:lnSpc>
-                <a:spcPct val="110000"/>
+                <a:spcPct val="115000"/>
               </a:lnSpc>
               <a:spcAft>
-                <a:spcPts val="1800"/>
+                <a:spcPts val="1600"/>
               </a:spcAft>
               <a:buNone/>
             </a:pPr>
-            <a:endParaRPr lang="en-US" sz="2800" dirty="0"/>
+            <a:endParaRPr lang="en-US" sz="2000" dirty="0"/>
           </a:p>
           <a:p>
             <a:pPr algn="l" indent="0" marL="0">
               <a:lnSpc>
-                <a:spcPct val="110000"/>
+                <a:spcPct val="115000"/>
               </a:lnSpc>
               <a:spcAft>
-                <a:spcPts val="1800"/>
+                <a:spcPts val="1600"/>
               </a:spcAft>
               <a:buNone/>
             </a:pPr>
             <a:r>
-              <a:rPr lang="en-US" sz="2800" dirty="0">
-                <a:solidFill>
-                  <a:srgbClr val="800000"/>
-                </a:solidFill>
-                <a:latin typeface="Calibri" pitchFamily="34" charset="0"/>
-                <a:ea typeface="Calibri" pitchFamily="34" charset="-122"/>
-                <a:cs typeface="Calibri" pitchFamily="34" charset="-120"/>
+              <a:rPr lang="en-US" sz="2000" b="1" dirty="0">
+                <a:solidFill>
+                  <a:srgbClr val="111111"/>
+                </a:solidFill>
+                <a:latin typeface="Avenir Next" pitchFamily="34" charset="0"/>
+                <a:ea typeface="Avenir Next" pitchFamily="34" charset="-122"/>
+                <a:cs typeface="Avenir Next" pitchFamily="34" charset="-120"/>
               </a:rPr>
               <a:t>You never have to look at the code.</a:t>
             </a:r>
-            <a:endParaRPr lang="en-US" sz="2800" dirty="0"/>
+            <a:endParaRPr lang="en-US" sz="2000" dirty="0"/>
           </a:p>
         </p:txBody>
       </p:sp>
@@ -4329,40 +4561,16 @@
           <a:chExt cx="0" cy="0"/>
         </a:xfrm>
       </p:grpSpPr>
-      <p:pic>
-        <p:nvPicPr>
-          <p:cNvPr id="2" name="Image 0" descr="/Users/batuhangundogdu/Claude Code Workshop/deck/assets/uchicago-footer.png">    </p:cNvPr>
-          <p:cNvPicPr>
-            <a:picLocks noChangeAspect="1"/>
-          </p:cNvPicPr>
-          <p:nvPr/>
-        </p:nvPicPr>
-        <p:blipFill>
-          <a:blip r:embed="rId1"/>
-          <a:stretch>
-            <a:fillRect/>
-          </a:stretch>
-        </p:blipFill>
-        <p:spPr>
-          <a:xfrm>
-            <a:off x="539496" y="6382512"/>
-            <a:ext cx="2843784" cy="475488"/>
-          </a:xfrm>
-          <a:prstGeom prst="rect">
-            <a:avLst/>
-          </a:prstGeom>
-        </p:spPr>
-      </p:pic>
-      <p:sp>
-        <p:nvSpPr>
-          <p:cNvPr id="3" name="Text 0"/>
-          <p:cNvSpPr/>
-          <p:nvPr/>
-        </p:nvSpPr>
-        <p:spPr>
-          <a:xfrm>
-            <a:off x="548640" y="365760"/>
-            <a:ext cx="11091672" cy="1188720"/>
+      <p:sp>
+        <p:nvSpPr>
+          <p:cNvPr id="2" name="Text 0"/>
+          <p:cNvSpPr/>
+          <p:nvPr/>
+        </p:nvSpPr>
+        <p:spPr>
+          <a:xfrm>
+            <a:off x="822960" y="658368"/>
+            <a:ext cx="10543032" cy="274320"/>
           </a:xfrm>
           <a:prstGeom prst="rect">
             <a:avLst/>
@@ -4378,30 +4586,92 @@
               <a:buNone/>
             </a:pPr>
             <a:r>
-              <a:rPr lang="en-US" sz="5000" b="1" dirty="0">
-                <a:solidFill>
-                  <a:srgbClr val="000000"/>
-                </a:solidFill>
-                <a:latin typeface="Calibri" pitchFamily="34" charset="0"/>
-                <a:ea typeface="Calibri" pitchFamily="34" charset="-122"/>
-                <a:cs typeface="Calibri" pitchFamily="34" charset="-120"/>
+              <a:rPr lang="en-US" sz="1200" b="1" spc="250" kern="0" dirty="0">
+                <a:solidFill>
+                  <a:srgbClr val="9A9A9A"/>
+                </a:solidFill>
+                <a:latin typeface="Avenir Next" pitchFamily="34" charset="0"/>
+                <a:ea typeface="Avenir Next" pitchFamily="34" charset="-122"/>
+                <a:cs typeface="Avenir Next" pitchFamily="34" charset="-120"/>
+              </a:rPr>
+              <a:t>MYTHS VS REALITY</a:t>
+            </a:r>
+            <a:endParaRPr lang="en-US" sz="1200" dirty="0"/>
+          </a:p>
+        </p:txBody>
+      </p:sp>
+      <p:sp>
+        <p:nvSpPr>
+          <p:cNvPr id="3" name="Shape 1"/>
+          <p:cNvSpPr/>
+          <p:nvPr/>
+        </p:nvSpPr>
+        <p:spPr>
+          <a:xfrm>
+            <a:off x="822960" y="969264"/>
+            <a:ext cx="566928" cy="41148"/>
+          </a:xfrm>
+          <a:prstGeom prst="rect">
+            <a:avLst/>
+          </a:prstGeom>
+          <a:solidFill>
+            <a:srgbClr val="2E7A72"/>
+          </a:solidFill>
+          <a:ln/>
+        </p:spPr>
+      </p:sp>
+      <p:sp>
+        <p:nvSpPr>
+          <p:cNvPr id="4" name="Text 2"/>
+          <p:cNvSpPr/>
+          <p:nvPr/>
+        </p:nvSpPr>
+        <p:spPr>
+          <a:xfrm>
+            <a:off x="822960" y="1161288"/>
+            <a:ext cx="10543032" cy="1188720"/>
+          </a:xfrm>
+          <a:prstGeom prst="rect">
+            <a:avLst/>
+          </a:prstGeom>
+          <a:noFill/>
+          <a:ln/>
+        </p:spPr>
+        <p:txBody>
+          <a:bodyPr wrap="square" lIns="0" tIns="0" rIns="0" bIns="0" rtlCol="0" anchor="t"/>
+          <a:lstStyle/>
+          <a:p>
+            <a:pPr algn="l" indent="0" marL="0">
+              <a:lnSpc>
+                <a:spcPct val="98000"/>
+              </a:lnSpc>
+              <a:buNone/>
+            </a:pPr>
+            <a:r>
+              <a:rPr lang="en-US" sz="4000" b="1" dirty="0">
+                <a:solidFill>
+                  <a:srgbClr val="111111"/>
+                </a:solidFill>
+                <a:latin typeface="Avenir Next" pitchFamily="34" charset="0"/>
+                <a:ea typeface="Avenir Next" pitchFamily="34" charset="-122"/>
+                <a:cs typeface="Avenir Next" pitchFamily="34" charset="-120"/>
               </a:rPr>
               <a:t>What people assume vs. what's true</a:t>
             </a:r>
-            <a:endParaRPr lang="en-US" sz="5000" dirty="0"/>
-          </a:p>
-        </p:txBody>
-      </p:sp>
-      <p:sp>
-        <p:nvSpPr>
-          <p:cNvPr id="4" name="Text 1"/>
-          <p:cNvSpPr/>
-          <p:nvPr/>
-        </p:nvSpPr>
-        <p:spPr>
-          <a:xfrm>
-            <a:off x="548640" y="1920240"/>
-            <a:ext cx="5271516" cy="4297680"/>
+            <a:endParaRPr lang="en-US" sz="4000" dirty="0"/>
+          </a:p>
+        </p:txBody>
+      </p:sp>
+      <p:sp>
+        <p:nvSpPr>
+          <p:cNvPr id="5" name="Text 3"/>
+          <p:cNvSpPr/>
+          <p:nvPr/>
+        </p:nvSpPr>
+        <p:spPr>
+          <a:xfrm>
+            <a:off x="822960" y="2441448"/>
+            <a:ext cx="4905756" cy="3959352"/>
           </a:xfrm>
           <a:prstGeom prst="rect">
             <a:avLst/>
@@ -4415,107 +4685,107 @@
           <a:p>
             <a:pPr algn="l" indent="0" marL="0">
               <a:lnSpc>
-                <a:spcPct val="110000"/>
+                <a:spcPct val="115000"/>
               </a:lnSpc>
               <a:spcAft>
-                <a:spcPts val="1600"/>
+                <a:spcPts val="1400"/>
               </a:spcAft>
               <a:buNone/>
             </a:pPr>
             <a:r>
-              <a:rPr lang="en-US" sz="2800" dirty="0">
-                <a:solidFill>
-                  <a:srgbClr val="800000"/>
-                </a:solidFill>
-                <a:latin typeface="Calibri" pitchFamily="34" charset="0"/>
-                <a:ea typeface="Calibri" pitchFamily="34" charset="-122"/>
-                <a:cs typeface="Calibri" pitchFamily="34" charset="-120"/>
+              <a:rPr lang="en-US" sz="2000" b="1" dirty="0">
+                <a:solidFill>
+                  <a:srgbClr val="111111"/>
+                </a:solidFill>
+                <a:latin typeface="Avenir Next" pitchFamily="34" charset="0"/>
+                <a:ea typeface="Avenir Next" pitchFamily="34" charset="-122"/>
+                <a:cs typeface="Avenir Next" pitchFamily="34" charset="-120"/>
               </a:rPr>
               <a:t>The assumption</a:t>
             </a:r>
-            <a:endParaRPr lang="en-US" sz="2800" dirty="0"/>
+            <a:endParaRPr lang="en-US" sz="2000" dirty="0"/>
           </a:p>
           <a:p>
             <a:pPr algn="l" indent="0" marL="0">
               <a:lnSpc>
-                <a:spcPct val="110000"/>
+                <a:spcPct val="115000"/>
               </a:lnSpc>
               <a:spcAft>
-                <a:spcPts val="1600"/>
+                <a:spcPts val="1400"/>
               </a:spcAft>
               <a:buNone/>
             </a:pPr>
             <a:r>
-              <a:rPr lang="en-US" sz="2800" dirty="0">
-                <a:solidFill>
-                  <a:srgbClr val="000000"/>
-                </a:solidFill>
-                <a:latin typeface="Calibri" pitchFamily="34" charset="0"/>
-                <a:ea typeface="Calibri" pitchFamily="34" charset="-122"/>
-                <a:cs typeface="Calibri" pitchFamily="34" charset="-120"/>
+              <a:rPr lang="en-US" sz="2000" dirty="0">
+                <a:solidFill>
+                  <a:srgbClr val="111111"/>
+                </a:solidFill>
+                <a:latin typeface="Avenir Next" pitchFamily="34" charset="0"/>
+                <a:ea typeface="Avenir Next" pitchFamily="34" charset="-122"/>
+                <a:cs typeface="Avenir Next" pitchFamily="34" charset="-120"/>
               </a:rPr>
               <a:t>“It's for programmers.”</a:t>
             </a:r>
-            <a:endParaRPr lang="en-US" sz="2800" dirty="0"/>
+            <a:endParaRPr lang="en-US" sz="2000" dirty="0"/>
           </a:p>
           <a:p>
             <a:pPr algn="l" indent="0" marL="0">
               <a:lnSpc>
-                <a:spcPct val="110000"/>
+                <a:spcPct val="115000"/>
               </a:lnSpc>
               <a:spcAft>
-                <a:spcPts val="1600"/>
+                <a:spcPts val="1400"/>
               </a:spcAft>
               <a:buNone/>
             </a:pPr>
             <a:r>
-              <a:rPr lang="en-US" sz="2800" dirty="0">
-                <a:solidFill>
-                  <a:srgbClr val="000000"/>
-                </a:solidFill>
-                <a:latin typeface="Calibri" pitchFamily="34" charset="0"/>
-                <a:ea typeface="Calibri" pitchFamily="34" charset="-122"/>
-                <a:cs typeface="Calibri" pitchFamily="34" charset="-120"/>
+              <a:rPr lang="en-US" sz="2000" dirty="0">
+                <a:solidFill>
+                  <a:srgbClr val="111111"/>
+                </a:solidFill>
+                <a:latin typeface="Avenir Next" pitchFamily="34" charset="0"/>
+                <a:ea typeface="Avenir Next" pitchFamily="34" charset="-122"/>
+                <a:cs typeface="Avenir Next" pitchFamily="34" charset="-120"/>
               </a:rPr>
               <a:t>“I'll have to learn to code.”</a:t>
             </a:r>
-            <a:endParaRPr lang="en-US" sz="2800" dirty="0"/>
+            <a:endParaRPr lang="en-US" sz="2000" dirty="0"/>
           </a:p>
           <a:p>
             <a:pPr algn="l" indent="0" marL="0">
               <a:lnSpc>
-                <a:spcPct val="110000"/>
+                <a:spcPct val="115000"/>
               </a:lnSpc>
               <a:spcAft>
-                <a:spcPts val="1600"/>
+                <a:spcPts val="1400"/>
               </a:spcAft>
               <a:buNone/>
             </a:pPr>
             <a:r>
-              <a:rPr lang="en-US" sz="2800" dirty="0">
-                <a:solidFill>
-                  <a:srgbClr val="000000"/>
-                </a:solidFill>
-                <a:latin typeface="Calibri" pitchFamily="34" charset="0"/>
-                <a:ea typeface="Calibri" pitchFamily="34" charset="-122"/>
-                <a:cs typeface="Calibri" pitchFamily="34" charset="-120"/>
+              <a:rPr lang="en-US" sz="2000" dirty="0">
+                <a:solidFill>
+                  <a:srgbClr val="111111"/>
+                </a:solidFill>
+                <a:latin typeface="Avenir Next" pitchFamily="34" charset="0"/>
+                <a:ea typeface="Avenir Next" pitchFamily="34" charset="-122"/>
+                <a:cs typeface="Avenir Next" pitchFamily="34" charset="-120"/>
               </a:rPr>
               <a:t>“It'll break and I won't know why.”</a:t>
             </a:r>
-            <a:endParaRPr lang="en-US" sz="2800" dirty="0"/>
-          </a:p>
-        </p:txBody>
-      </p:sp>
-      <p:sp>
-        <p:nvSpPr>
-          <p:cNvPr id="5" name="Text 2"/>
-          <p:cNvSpPr/>
-          <p:nvPr/>
-        </p:nvSpPr>
-        <p:spPr>
-          <a:xfrm>
-            <a:off x="6368796" y="1920240"/>
-            <a:ext cx="5271516" cy="4297680"/>
+            <a:endParaRPr lang="en-US" sz="2000" dirty="0"/>
+          </a:p>
+        </p:txBody>
+      </p:sp>
+      <p:sp>
+        <p:nvSpPr>
+          <p:cNvPr id="6" name="Text 4"/>
+          <p:cNvSpPr/>
+          <p:nvPr/>
+        </p:nvSpPr>
+        <p:spPr>
+          <a:xfrm>
+            <a:off x="6460236" y="2441448"/>
+            <a:ext cx="4905756" cy="3959352"/>
           </a:xfrm>
           <a:prstGeom prst="rect">
             <a:avLst/>
@@ -4529,94 +4799,94 @@
           <a:p>
             <a:pPr algn="l" indent="0" marL="0">
               <a:lnSpc>
-                <a:spcPct val="110000"/>
+                <a:spcPct val="115000"/>
               </a:lnSpc>
               <a:spcAft>
-                <a:spcPts val="1600"/>
+                <a:spcPts val="1400"/>
               </a:spcAft>
               <a:buNone/>
             </a:pPr>
             <a:r>
-              <a:rPr lang="en-US" sz="2800" dirty="0">
-                <a:solidFill>
-                  <a:srgbClr val="800000"/>
-                </a:solidFill>
-                <a:latin typeface="Calibri" pitchFamily="34" charset="0"/>
-                <a:ea typeface="Calibri" pitchFamily="34" charset="-122"/>
-                <a:cs typeface="Calibri" pitchFamily="34" charset="-120"/>
+              <a:rPr lang="en-US" sz="2000" b="1" dirty="0">
+                <a:solidFill>
+                  <a:srgbClr val="111111"/>
+                </a:solidFill>
+                <a:latin typeface="Avenir Next" pitchFamily="34" charset="0"/>
+                <a:ea typeface="Avenir Next" pitchFamily="34" charset="-122"/>
+                <a:cs typeface="Avenir Next" pitchFamily="34" charset="-120"/>
               </a:rPr>
               <a:t>The reality</a:t>
             </a:r>
-            <a:endParaRPr lang="en-US" sz="2800" dirty="0"/>
+            <a:endParaRPr lang="en-US" sz="2000" dirty="0"/>
           </a:p>
           <a:p>
             <a:pPr algn="l" indent="0" marL="0">
               <a:lnSpc>
-                <a:spcPct val="110000"/>
+                <a:spcPct val="115000"/>
               </a:lnSpc>
               <a:spcAft>
-                <a:spcPts val="1600"/>
+                <a:spcPts val="1400"/>
               </a:spcAft>
               <a:buNone/>
             </a:pPr>
             <a:r>
-              <a:rPr lang="en-US" sz="2800" dirty="0">
-                <a:solidFill>
-                  <a:srgbClr val="00B050"/>
-                </a:solidFill>
-                <a:latin typeface="Calibri" pitchFamily="34" charset="0"/>
-                <a:ea typeface="Calibri" pitchFamily="34" charset="-122"/>
-                <a:cs typeface="Calibri" pitchFamily="34" charset="-120"/>
+              <a:rPr lang="en-US" sz="2000" dirty="0">
+                <a:solidFill>
+                  <a:srgbClr val="2E7A72"/>
+                </a:solidFill>
+                <a:latin typeface="Avenir Next" pitchFamily="34" charset="0"/>
+                <a:ea typeface="Avenir Next" pitchFamily="34" charset="-122"/>
+                <a:cs typeface="Avenir Next" pitchFamily="34" charset="-120"/>
               </a:rPr>
               <a:t>It's for anyone with a task.</a:t>
             </a:r>
-            <a:endParaRPr lang="en-US" sz="2800" dirty="0"/>
+            <a:endParaRPr lang="en-US" sz="2000" dirty="0"/>
           </a:p>
           <a:p>
             <a:pPr algn="l" indent="0" marL="0">
               <a:lnSpc>
-                <a:spcPct val="110000"/>
+                <a:spcPct val="115000"/>
               </a:lnSpc>
               <a:spcAft>
-                <a:spcPts val="1600"/>
+                <a:spcPts val="1400"/>
               </a:spcAft>
               <a:buNone/>
             </a:pPr>
             <a:r>
-              <a:rPr lang="en-US" sz="2800" dirty="0">
-                <a:solidFill>
-                  <a:srgbClr val="00B050"/>
-                </a:solidFill>
-                <a:latin typeface="Calibri" pitchFamily="34" charset="0"/>
-                <a:ea typeface="Calibri" pitchFamily="34" charset="-122"/>
-                <a:cs typeface="Calibri" pitchFamily="34" charset="-120"/>
+              <a:rPr lang="en-US" sz="2000" dirty="0">
+                <a:solidFill>
+                  <a:srgbClr val="2E7A72"/>
+                </a:solidFill>
+                <a:latin typeface="Avenir Next" pitchFamily="34" charset="0"/>
+                <a:ea typeface="Avenir Next" pitchFamily="34" charset="-122"/>
+                <a:cs typeface="Avenir Next" pitchFamily="34" charset="-120"/>
               </a:rPr>
               <a:t>You describe; it writes.</a:t>
             </a:r>
-            <a:endParaRPr lang="en-US" sz="2800" dirty="0"/>
+            <a:endParaRPr lang="en-US" sz="2000" dirty="0"/>
           </a:p>
           <a:p>
             <a:pPr algn="l" indent="0" marL="0">
               <a:lnSpc>
-                <a:spcPct val="110000"/>
+                <a:spcPct val="115000"/>
               </a:lnSpc>
               <a:spcAft>
-                <a:spcPts val="1600"/>
+                <a:spcPts val="1400"/>
               </a:spcAft>
               <a:buNone/>
             </a:pPr>
             <a:r>
-              <a:rPr lang="en-US" sz="2800" dirty="0">
-                <a:solidFill>
-                  <a:srgbClr val="00B050"/>
-                </a:solidFill>
-                <a:latin typeface="Calibri" pitchFamily="34" charset="0"/>
-                <a:ea typeface="Calibri" pitchFamily="34" charset="-122"/>
-                <a:cs typeface="Calibri" pitchFamily="34" charset="-120"/>
+              <a:rPr lang="en-US" sz="2000" dirty="0">
+                <a:solidFill>
+                  <a:srgbClr val="2E7A72"/>
+                </a:solidFill>
+                <a:latin typeface="Avenir Next" pitchFamily="34" charset="0"/>
+                <a:ea typeface="Avenir Next" pitchFamily="34" charset="-122"/>
+                <a:cs typeface="Avenir Next" pitchFamily="34" charset="-120"/>
               </a:rPr>
               <a:t>You say “that's wrong, fix it.”</a:t>
             </a:r>
-            <a:endParaRPr lang="en-US" sz="2800" dirty="0"/>
+            <a:endParaRPr lang="en-US" sz="2000" dirty="0"/>
           </a:p>
         </p:txBody>
       </p:sp>
@@ -4645,40 +4915,16 @@
           <a:chExt cx="0" cy="0"/>
         </a:xfrm>
       </p:grpSpPr>
-      <p:pic>
-        <p:nvPicPr>
-          <p:cNvPr id="2" name="Image 0" descr="/Users/batuhangundogdu/Claude Code Workshop/deck/assets/uchicago-footer.png">    </p:cNvPr>
-          <p:cNvPicPr>
-            <a:picLocks noChangeAspect="1"/>
-          </p:cNvPicPr>
-          <p:nvPr/>
-        </p:nvPicPr>
-        <p:blipFill>
-          <a:blip r:embed="rId1"/>
-          <a:stretch>
-            <a:fillRect/>
-          </a:stretch>
-        </p:blipFill>
-        <p:spPr>
-          <a:xfrm>
-            <a:off x="539496" y="6382512"/>
-            <a:ext cx="2843784" cy="475488"/>
-          </a:xfrm>
-          <a:prstGeom prst="rect">
-            <a:avLst/>
-          </a:prstGeom>
-        </p:spPr>
-      </p:pic>
-      <p:sp>
-        <p:nvSpPr>
-          <p:cNvPr id="3" name="Text 0"/>
-          <p:cNvSpPr/>
-          <p:nvPr/>
-        </p:nvSpPr>
-        <p:spPr>
-          <a:xfrm>
-            <a:off x="548640" y="365760"/>
-            <a:ext cx="11091672" cy="1188720"/>
+      <p:sp>
+        <p:nvSpPr>
+          <p:cNvPr id="2" name="Text 0"/>
+          <p:cNvSpPr/>
+          <p:nvPr/>
+        </p:nvSpPr>
+        <p:spPr>
+          <a:xfrm>
+            <a:off x="822960" y="658368"/>
+            <a:ext cx="10543032" cy="274320"/>
           </a:xfrm>
           <a:prstGeom prst="rect">
             <a:avLst/>
@@ -4694,30 +4940,92 @@
               <a:buNone/>
             </a:pPr>
             <a:r>
-              <a:rPr lang="en-US" sz="5000" b="1" dirty="0">
-                <a:solidFill>
-                  <a:srgbClr val="000000"/>
-                </a:solidFill>
-                <a:latin typeface="Calibri" pitchFamily="34" charset="0"/>
-                <a:ea typeface="Calibri" pitchFamily="34" charset="-122"/>
-                <a:cs typeface="Calibri" pitchFamily="34" charset="-120"/>
+              <a:rPr lang="en-US" sz="1200" b="1" spc="250" kern="0" dirty="0">
+                <a:solidFill>
+                  <a:srgbClr val="9A9A9A"/>
+                </a:solidFill>
+                <a:latin typeface="Avenir Next" pitchFamily="34" charset="0"/>
+                <a:ea typeface="Avenir Next" pitchFamily="34" charset="-122"/>
+                <a:cs typeface="Avenir Next" pitchFamily="34" charset="-120"/>
+              </a:rPr>
+              <a:t>BEFORE WE START</a:t>
+            </a:r>
+            <a:endParaRPr lang="en-US" sz="1200" dirty="0"/>
+          </a:p>
+        </p:txBody>
+      </p:sp>
+      <p:sp>
+        <p:nvSpPr>
+          <p:cNvPr id="3" name="Shape 1"/>
+          <p:cNvSpPr/>
+          <p:nvPr/>
+        </p:nvSpPr>
+        <p:spPr>
+          <a:xfrm>
+            <a:off x="822960" y="969264"/>
+            <a:ext cx="566928" cy="41148"/>
+          </a:xfrm>
+          <a:prstGeom prst="rect">
+            <a:avLst/>
+          </a:prstGeom>
+          <a:solidFill>
+            <a:srgbClr val="2E7A72"/>
+          </a:solidFill>
+          <a:ln/>
+        </p:spPr>
+      </p:sp>
+      <p:sp>
+        <p:nvSpPr>
+          <p:cNvPr id="4" name="Text 2"/>
+          <p:cNvSpPr/>
+          <p:nvPr/>
+        </p:nvSpPr>
+        <p:spPr>
+          <a:xfrm>
+            <a:off x="822960" y="1161288"/>
+            <a:ext cx="10543032" cy="1188720"/>
+          </a:xfrm>
+          <a:prstGeom prst="rect">
+            <a:avLst/>
+          </a:prstGeom>
+          <a:noFill/>
+          <a:ln/>
+        </p:spPr>
+        <p:txBody>
+          <a:bodyPr wrap="square" lIns="0" tIns="0" rIns="0" bIns="0" rtlCol="0" anchor="t"/>
+          <a:lstStyle/>
+          <a:p>
+            <a:pPr algn="l" indent="0" marL="0">
+              <a:lnSpc>
+                <a:spcPct val="98000"/>
+              </a:lnSpc>
+              <a:buNone/>
+            </a:pPr>
+            <a:r>
+              <a:rPr lang="en-US" sz="4000" b="1" dirty="0">
+                <a:solidFill>
+                  <a:srgbClr val="111111"/>
+                </a:solidFill>
+                <a:latin typeface="Avenir Next" pitchFamily="34" charset="0"/>
+                <a:ea typeface="Avenir Next" pitchFamily="34" charset="-122"/>
+                <a:cs typeface="Avenir Next" pitchFamily="34" charset="-120"/>
               </a:rPr>
               <a:t>One small thing before we start…</a:t>
             </a:r>
-            <a:endParaRPr lang="en-US" sz="5000" dirty="0"/>
-          </a:p>
-        </p:txBody>
-      </p:sp>
-      <p:sp>
-        <p:nvSpPr>
-          <p:cNvPr id="4" name="Text 1"/>
-          <p:cNvSpPr/>
-          <p:nvPr/>
-        </p:nvSpPr>
-        <p:spPr>
-          <a:xfrm>
-            <a:off x="548640" y="1920240"/>
-            <a:ext cx="11091672" cy="4297680"/>
+            <a:endParaRPr lang="en-US" sz="4000" dirty="0"/>
+          </a:p>
+        </p:txBody>
+      </p:sp>
+      <p:sp>
+        <p:nvSpPr>
+          <p:cNvPr id="5" name="Text 3"/>
+          <p:cNvSpPr/>
+          <p:nvPr/>
+        </p:nvSpPr>
+        <p:spPr>
+          <a:xfrm>
+            <a:off x="822960" y="2441448"/>
+            <a:ext cx="10543032" cy="3959352"/>
           </a:xfrm>
           <a:prstGeom prst="rect">
             <a:avLst/>
@@ -4731,83 +5039,83 @@
           <a:p>
             <a:pPr algn="l" indent="0" marL="0">
               <a:lnSpc>
-                <a:spcPct val="110000"/>
+                <a:spcPct val="115000"/>
               </a:lnSpc>
               <a:spcAft>
-                <a:spcPts val="1800"/>
+                <a:spcPts val="1600"/>
               </a:spcAft>
               <a:buNone/>
             </a:pPr>
             <a:r>
-              <a:rPr lang="en-US" sz="2800" dirty="0">
-                <a:solidFill>
-                  <a:srgbClr val="0070C0"/>
-                </a:solidFill>
-                <a:latin typeface="Calibri" pitchFamily="34" charset="0"/>
-                <a:ea typeface="Calibri" pitchFamily="34" charset="-122"/>
-                <a:cs typeface="Calibri" pitchFamily="34" charset="-120"/>
+              <a:rPr lang="en-US" sz="2000" dirty="0">
+                <a:solidFill>
+                  <a:srgbClr val="2E7A72"/>
+                </a:solidFill>
+                <a:latin typeface="Avenir Next" pitchFamily="34" charset="0"/>
+                <a:ea typeface="Avenir Next" pitchFamily="34" charset="-122"/>
+                <a:cs typeface="Avenir Next" pitchFamily="34" charset="-120"/>
               </a:rPr>
               <a:t>These slides were made by talking to Claude Code.</a:t>
             </a:r>
-            <a:endParaRPr lang="en-US" sz="2800" dirty="0"/>
+            <a:endParaRPr lang="en-US" sz="2000" dirty="0"/>
           </a:p>
           <a:p>
             <a:pPr algn="l" indent="0" marL="0">
               <a:lnSpc>
-                <a:spcPct val="110000"/>
+                <a:spcPct val="115000"/>
               </a:lnSpc>
               <a:spcAft>
-                <a:spcPts val="1800"/>
+                <a:spcPts val="1600"/>
               </a:spcAft>
               <a:buNone/>
             </a:pPr>
             <a:r>
-              <a:rPr lang="en-US" sz="2800" dirty="0">
-                <a:solidFill>
-                  <a:srgbClr val="0070C0"/>
-                </a:solidFill>
-                <a:latin typeface="Calibri" pitchFamily="34" charset="0"/>
-                <a:ea typeface="Calibri" pitchFamily="34" charset="-122"/>
-                <a:cs typeface="Calibri" pitchFamily="34" charset="-120"/>
+              <a:rPr lang="en-US" sz="2000" dirty="0">
+                <a:solidFill>
+                  <a:srgbClr val="2E7A72"/>
+                </a:solidFill>
+                <a:latin typeface="Avenir Next" pitchFamily="34" charset="0"/>
+                <a:ea typeface="Avenir Next" pitchFamily="34" charset="-122"/>
+                <a:cs typeface="Avenir Next" pitchFamily="34" charset="-120"/>
               </a:rPr>
               <a:t>So were the four apps you're about to see.</a:t>
             </a:r>
-            <a:endParaRPr lang="en-US" sz="2800" dirty="0"/>
+            <a:endParaRPr lang="en-US" sz="2000" dirty="0"/>
           </a:p>
           <a:p>
             <a:pPr algn="l" indent="0" marL="0">
               <a:lnSpc>
-                <a:spcPct val="110000"/>
+                <a:spcPct val="115000"/>
               </a:lnSpc>
               <a:spcAft>
-                <a:spcPts val="1800"/>
+                <a:spcPts val="1600"/>
               </a:spcAft>
               <a:buNone/>
             </a:pPr>
-            <a:endParaRPr lang="en-US" sz="2800" dirty="0"/>
+            <a:endParaRPr lang="en-US" sz="2000" dirty="0"/>
           </a:p>
           <a:p>
             <a:pPr algn="l" indent="0" marL="0">
               <a:lnSpc>
-                <a:spcPct val="110000"/>
+                <a:spcPct val="115000"/>
               </a:lnSpc>
               <a:spcAft>
-                <a:spcPts val="1800"/>
+                <a:spcPts val="1600"/>
               </a:spcAft>
               <a:buNone/>
             </a:pPr>
             <a:r>
-              <a:rPr lang="en-US" sz="2800" dirty="0">
-                <a:solidFill>
-                  <a:srgbClr val="800000"/>
-                </a:solidFill>
-                <a:latin typeface="Calibri" pitchFamily="34" charset="0"/>
-                <a:ea typeface="Calibri" pitchFamily="34" charset="-122"/>
-                <a:cs typeface="Calibri" pitchFamily="34" charset="-120"/>
+              <a:rPr lang="en-US" sz="2000" b="1" dirty="0">
+                <a:solidFill>
+                  <a:srgbClr val="111111"/>
+                </a:solidFill>
+                <a:latin typeface="Avenir Next" pitchFamily="34" charset="0"/>
+                <a:ea typeface="Avenir Next" pitchFamily="34" charset="-122"/>
+                <a:cs typeface="Avenir Next" pitchFamily="34" charset="-120"/>
               </a:rPr>
               <a:t>Hold that thought. We'll come back to it.</a:t>
             </a:r>
-            <a:endParaRPr lang="en-US" sz="2800" dirty="0"/>
+            <a:endParaRPr lang="en-US" sz="2000" dirty="0"/>
           </a:p>
         </p:txBody>
       </p:sp>
@@ -4836,40 +5144,16 @@
           <a:chExt cx="0" cy="0"/>
         </a:xfrm>
       </p:grpSpPr>
-      <p:pic>
-        <p:nvPicPr>
-          <p:cNvPr id="2" name="Image 0" descr="/Users/batuhangundogdu/Claude Code Workshop/deck/assets/uchicago-footer.png">    </p:cNvPr>
-          <p:cNvPicPr>
-            <a:picLocks noChangeAspect="1"/>
-          </p:cNvPicPr>
-          <p:nvPr/>
-        </p:nvPicPr>
-        <p:blipFill>
-          <a:blip r:embed="rId1"/>
-          <a:stretch>
-            <a:fillRect/>
-          </a:stretch>
-        </p:blipFill>
-        <p:spPr>
-          <a:xfrm>
-            <a:off x="539496" y="6382512"/>
-            <a:ext cx="2843784" cy="475488"/>
-          </a:xfrm>
-          <a:prstGeom prst="rect">
-            <a:avLst/>
-          </a:prstGeom>
-        </p:spPr>
-      </p:pic>
-      <p:sp>
-        <p:nvSpPr>
-          <p:cNvPr id="3" name="Text 0"/>
-          <p:cNvSpPr/>
-          <p:nvPr/>
-        </p:nvSpPr>
-        <p:spPr>
-          <a:xfrm>
-            <a:off x="548640" y="2468880"/>
-            <a:ext cx="11091672" cy="457200"/>
+      <p:sp>
+        <p:nvSpPr>
+          <p:cNvPr id="2" name="Text 0"/>
+          <p:cNvSpPr/>
+          <p:nvPr/>
+        </p:nvSpPr>
+        <p:spPr>
+          <a:xfrm>
+            <a:off x="822960" y="2514600"/>
+            <a:ext cx="10543032" cy="365760"/>
           </a:xfrm>
           <a:prstGeom prst="rect">
             <a:avLst/>
@@ -4885,30 +5169,50 @@
               <a:buNone/>
             </a:pPr>
             <a:r>
-              <a:rPr lang="en-US" sz="2400" spc="200" kern="0" dirty="0">
-                <a:solidFill>
-                  <a:srgbClr val="800000"/>
-                </a:solidFill>
-                <a:latin typeface="Calibri" pitchFamily="34" charset="0"/>
-                <a:ea typeface="Calibri" pitchFamily="34" charset="-122"/>
-                <a:cs typeface="Calibri" pitchFamily="34" charset="-120"/>
+              <a:rPr lang="en-US" sz="1500" b="1" spc="300" kern="0" dirty="0">
+                <a:solidFill>
+                  <a:srgbClr val="2E7A72"/>
+                </a:solidFill>
+                <a:latin typeface="Avenir Next" pitchFamily="34" charset="0"/>
+                <a:ea typeface="Avenir Next" pitchFamily="34" charset="-122"/>
+                <a:cs typeface="Avenir Next" pitchFamily="34" charset="-120"/>
               </a:rPr>
               <a:t>PART TWO</a:t>
             </a:r>
-            <a:endParaRPr lang="en-US" sz="2400" dirty="0"/>
-          </a:p>
-        </p:txBody>
-      </p:sp>
-      <p:sp>
-        <p:nvSpPr>
-          <p:cNvPr id="4" name="Text 1"/>
-          <p:cNvSpPr/>
-          <p:nvPr/>
-        </p:nvSpPr>
-        <p:spPr>
-          <a:xfrm>
-            <a:off x="548640" y="2926080"/>
-            <a:ext cx="11091672" cy="1463040"/>
+            <a:endParaRPr lang="en-US" sz="1500" dirty="0"/>
+          </a:p>
+        </p:txBody>
+      </p:sp>
+      <p:sp>
+        <p:nvSpPr>
+          <p:cNvPr id="3" name="Shape 1"/>
+          <p:cNvSpPr/>
+          <p:nvPr/>
+        </p:nvSpPr>
+        <p:spPr>
+          <a:xfrm>
+            <a:off x="822960" y="2926080"/>
+            <a:ext cx="566928" cy="41148"/>
+          </a:xfrm>
+          <a:prstGeom prst="rect">
+            <a:avLst/>
+          </a:prstGeom>
+          <a:solidFill>
+            <a:srgbClr val="2E7A72"/>
+          </a:solidFill>
+          <a:ln/>
+        </p:spPr>
+      </p:sp>
+      <p:sp>
+        <p:nvSpPr>
+          <p:cNvPr id="4" name="Text 2"/>
+          <p:cNvSpPr/>
+          <p:nvPr/>
+        </p:nvSpPr>
+        <p:spPr>
+          <a:xfrm>
+            <a:off x="822960" y="3108960"/>
+            <a:ext cx="10543032" cy="1463040"/>
           </a:xfrm>
           <a:prstGeom prst="rect">
             <a:avLst/>
@@ -4921,20 +5225,23 @@
           <a:lstStyle/>
           <a:p>
             <a:pPr algn="l" indent="0" marL="0">
-              <a:buNone/>
-            </a:pPr>
-            <a:r>
-              <a:rPr lang="en-US" sz="5000" b="1" dirty="0">
-                <a:solidFill>
-                  <a:srgbClr val="000000"/>
-                </a:solidFill>
-                <a:latin typeface="Calibri" pitchFamily="34" charset="0"/>
-                <a:ea typeface="Calibri" pitchFamily="34" charset="-122"/>
-                <a:cs typeface="Calibri" pitchFamily="34" charset="-120"/>
+              <a:lnSpc>
+                <a:spcPct val="98000"/>
+              </a:lnSpc>
+              <a:buNone/>
+            </a:pPr>
+            <a:r>
+              <a:rPr lang="en-US" sz="4400" b="1" dirty="0">
+                <a:solidFill>
+                  <a:srgbClr val="111111"/>
+                </a:solidFill>
+                <a:latin typeface="Avenir Next" pitchFamily="34" charset="0"/>
+                <a:ea typeface="Avenir Next" pitchFamily="34" charset="-122"/>
+                <a:cs typeface="Avenir Next" pitchFamily="34" charset="-120"/>
               </a:rPr>
               <a:t>Let's build four everyday tools</a:t>
             </a:r>
-            <a:endParaRPr lang="en-US" sz="5000" dirty="0"/>
+            <a:endParaRPr lang="en-US" sz="4400" dirty="0"/>
           </a:p>
         </p:txBody>
       </p:sp>
@@ -4963,40 +5270,16 @@
           <a:chExt cx="0" cy="0"/>
         </a:xfrm>
       </p:grpSpPr>
-      <p:pic>
-        <p:nvPicPr>
-          <p:cNvPr id="2" name="Image 0" descr="/Users/batuhangundogdu/Claude Code Workshop/deck/assets/uchicago-footer.png">    </p:cNvPr>
-          <p:cNvPicPr>
-            <a:picLocks noChangeAspect="1"/>
-          </p:cNvPicPr>
-          <p:nvPr/>
-        </p:nvPicPr>
-        <p:blipFill>
-          <a:blip r:embed="rId1"/>
-          <a:stretch>
-            <a:fillRect/>
-          </a:stretch>
-        </p:blipFill>
-        <p:spPr>
-          <a:xfrm>
-            <a:off x="539496" y="6382512"/>
-            <a:ext cx="2843784" cy="475488"/>
-          </a:xfrm>
-          <a:prstGeom prst="rect">
-            <a:avLst/>
-          </a:prstGeom>
-        </p:spPr>
-      </p:pic>
-      <p:sp>
-        <p:nvSpPr>
-          <p:cNvPr id="3" name="Text 0"/>
-          <p:cNvSpPr/>
-          <p:nvPr/>
-        </p:nvSpPr>
-        <p:spPr>
-          <a:xfrm>
-            <a:off x="548640" y="365760"/>
-            <a:ext cx="11091672" cy="1188720"/>
+      <p:sp>
+        <p:nvSpPr>
+          <p:cNvPr id="2" name="Text 0"/>
+          <p:cNvSpPr/>
+          <p:nvPr/>
+        </p:nvSpPr>
+        <p:spPr>
+          <a:xfrm>
+            <a:off x="822960" y="658368"/>
+            <a:ext cx="10543032" cy="274320"/>
           </a:xfrm>
           <a:prstGeom prst="rect">
             <a:avLst/>
@@ -5012,30 +5295,92 @@
               <a:buNone/>
             </a:pPr>
             <a:r>
-              <a:rPr lang="en-US" sz="5000" b="1" dirty="0">
-                <a:solidFill>
-                  <a:srgbClr val="000000"/>
-                </a:solidFill>
-                <a:latin typeface="Calibri" pitchFamily="34" charset="0"/>
-                <a:ea typeface="Calibri" pitchFamily="34" charset="-122"/>
-                <a:cs typeface="Calibri" pitchFamily="34" charset="-120"/>
+              <a:rPr lang="en-US" sz="1200" b="1" spc="250" kern="0" dirty="0">
+                <a:solidFill>
+                  <a:srgbClr val="9A9A9A"/>
+                </a:solidFill>
+                <a:latin typeface="Avenir Next" pitchFamily="34" charset="0"/>
+                <a:ea typeface="Avenir Next" pitchFamily="34" charset="-122"/>
+                <a:cs typeface="Avenir Next" pitchFamily="34" charset="-120"/>
+              </a:rPr>
+              <a:t>THE PLAN</a:t>
+            </a:r>
+            <a:endParaRPr lang="en-US" sz="1200" dirty="0"/>
+          </a:p>
+        </p:txBody>
+      </p:sp>
+      <p:sp>
+        <p:nvSpPr>
+          <p:cNvPr id="3" name="Shape 1"/>
+          <p:cNvSpPr/>
+          <p:nvPr/>
+        </p:nvSpPr>
+        <p:spPr>
+          <a:xfrm>
+            <a:off x="822960" y="969264"/>
+            <a:ext cx="566928" cy="41148"/>
+          </a:xfrm>
+          <a:prstGeom prst="rect">
+            <a:avLst/>
+          </a:prstGeom>
+          <a:solidFill>
+            <a:srgbClr val="2E7A72"/>
+          </a:solidFill>
+          <a:ln/>
+        </p:spPr>
+      </p:sp>
+      <p:sp>
+        <p:nvSpPr>
+          <p:cNvPr id="4" name="Text 2"/>
+          <p:cNvSpPr/>
+          <p:nvPr/>
+        </p:nvSpPr>
+        <p:spPr>
+          <a:xfrm>
+            <a:off x="822960" y="1161288"/>
+            <a:ext cx="10543032" cy="1188720"/>
+          </a:xfrm>
+          <a:prstGeom prst="rect">
+            <a:avLst/>
+          </a:prstGeom>
+          <a:noFill/>
+          <a:ln/>
+        </p:spPr>
+        <p:txBody>
+          <a:bodyPr wrap="square" lIns="0" tIns="0" rIns="0" bIns="0" rtlCol="0" anchor="t"/>
+          <a:lstStyle/>
+          <a:p>
+            <a:pPr algn="l" indent="0" marL="0">
+              <a:lnSpc>
+                <a:spcPct val="98000"/>
+              </a:lnSpc>
+              <a:buNone/>
+            </a:pPr>
+            <a:r>
+              <a:rPr lang="en-US" sz="4000" b="1" dirty="0">
+                <a:solidFill>
+                  <a:srgbClr val="111111"/>
+                </a:solidFill>
+                <a:latin typeface="Avenir Next" pitchFamily="34" charset="0"/>
+                <a:ea typeface="Avenir Next" pitchFamily="34" charset="-122"/>
+                <a:cs typeface="Avenir Next" pitchFamily="34" charset="-120"/>
               </a:rPr>
               <a:t>Four tools, built live, in front of you</a:t>
             </a:r>
-            <a:endParaRPr lang="en-US" sz="5000" dirty="0"/>
-          </a:p>
-        </p:txBody>
-      </p:sp>
-      <p:sp>
-        <p:nvSpPr>
-          <p:cNvPr id="4" name="Text 1"/>
-          <p:cNvSpPr/>
-          <p:nvPr/>
-        </p:nvSpPr>
-        <p:spPr>
-          <a:xfrm>
-            <a:off x="548640" y="1920240"/>
-            <a:ext cx="11091672" cy="4297680"/>
+            <a:endParaRPr lang="en-US" sz="4000" dirty="0"/>
+          </a:p>
+        </p:txBody>
+      </p:sp>
+      <p:sp>
+        <p:nvSpPr>
+          <p:cNvPr id="5" name="Text 3"/>
+          <p:cNvSpPr/>
+          <p:nvPr/>
+        </p:nvSpPr>
+        <p:spPr>
+          <a:xfrm>
+            <a:off x="822960" y="2441448"/>
+            <a:ext cx="10543032" cy="3959352"/>
           </a:xfrm>
           <a:prstGeom prst="rect">
             <a:avLst/>
@@ -5049,129 +5394,129 @@
           <a:p>
             <a:pPr algn="l" indent="0" marL="0">
               <a:lnSpc>
-                <a:spcPct val="110000"/>
+                <a:spcPct val="115000"/>
               </a:lnSpc>
               <a:spcAft>
-                <a:spcPts val="1800"/>
+                <a:spcPts val="1600"/>
               </a:spcAft>
               <a:buNone/>
             </a:pPr>
             <a:r>
-              <a:rPr lang="en-US" sz="2800" dirty="0">
-                <a:solidFill>
-                  <a:srgbClr val="000000"/>
-                </a:solidFill>
-                <a:latin typeface="Calibri" pitchFamily="34" charset="0"/>
-                <a:ea typeface="Calibri" pitchFamily="34" charset="-122"/>
-                <a:cs typeface="Calibri" pitchFamily="34" charset="-120"/>
+              <a:rPr lang="en-US" sz="2000" dirty="0">
+                <a:solidFill>
+                  <a:srgbClr val="111111"/>
+                </a:solidFill>
+                <a:latin typeface="Avenir Next" pitchFamily="34" charset="0"/>
+                <a:ea typeface="Avenir Next" pitchFamily="34" charset="-122"/>
+                <a:cs typeface="Avenir Next" pitchFamily="34" charset="-120"/>
               </a:rPr>
               <a:t>1 · A budget controller - track money, see a chart.</a:t>
             </a:r>
-            <a:endParaRPr lang="en-US" sz="2800" dirty="0"/>
+            <a:endParaRPr lang="en-US" sz="2000" dirty="0"/>
           </a:p>
           <a:p>
             <a:pPr algn="l" indent="0" marL="0">
               <a:lnSpc>
-                <a:spcPct val="110000"/>
+                <a:spcPct val="115000"/>
               </a:lnSpc>
               <a:spcAft>
-                <a:spcPts val="1800"/>
+                <a:spcPts val="1600"/>
               </a:spcAft>
               <a:buNone/>
             </a:pPr>
             <a:r>
-              <a:rPr lang="en-US" sz="2800" dirty="0">
-                <a:solidFill>
-                  <a:srgbClr val="000000"/>
-                </a:solidFill>
-                <a:latin typeface="Calibri" pitchFamily="34" charset="0"/>
-                <a:ea typeface="Calibri" pitchFamily="34" charset="-122"/>
-                <a:cs typeface="Calibri" pitchFamily="34" charset="-120"/>
+              <a:rPr lang="en-US" sz="2000" dirty="0">
+                <a:solidFill>
+                  <a:srgbClr val="111111"/>
+                </a:solidFill>
+                <a:latin typeface="Avenir Next" pitchFamily="34" charset="0"/>
+                <a:ea typeface="Avenir Next" pitchFamily="34" charset="-122"/>
+                <a:cs typeface="Avenir Next" pitchFamily="34" charset="-120"/>
               </a:rPr>
               <a:t>2 · A research paper tracker - what to read, what's done.</a:t>
             </a:r>
-            <a:endParaRPr lang="en-US" sz="2800" dirty="0"/>
+            <a:endParaRPr lang="en-US" sz="2000" dirty="0"/>
           </a:p>
           <a:p>
             <a:pPr algn="l" indent="0" marL="0">
               <a:lnSpc>
-                <a:spcPct val="110000"/>
+                <a:spcPct val="115000"/>
               </a:lnSpc>
               <a:spcAft>
-                <a:spcPts val="1800"/>
+                <a:spcPts val="1600"/>
               </a:spcAft>
               <a:buNone/>
             </a:pPr>
             <a:r>
-              <a:rPr lang="en-US" sz="2800" dirty="0">
-                <a:solidFill>
-                  <a:srgbClr val="000000"/>
-                </a:solidFill>
-                <a:latin typeface="Calibri" pitchFamily="34" charset="0"/>
-                <a:ea typeface="Calibri" pitchFamily="34" charset="-122"/>
-                <a:cs typeface="Calibri" pitchFamily="34" charset="-120"/>
+              <a:rPr lang="en-US" sz="2000" dirty="0">
+                <a:solidFill>
+                  <a:srgbClr val="111111"/>
+                </a:solidFill>
+                <a:latin typeface="Avenir Next" pitchFamily="34" charset="0"/>
+                <a:ea typeface="Avenir Next" pitchFamily="34" charset="-122"/>
+                <a:cs typeface="Avenir Next" pitchFamily="34" charset="-120"/>
               </a:rPr>
               <a:t>3 · A daily dashboard - todos, reminders, nudges.</a:t>
             </a:r>
-            <a:endParaRPr lang="en-US" sz="2800" dirty="0"/>
+            <a:endParaRPr lang="en-US" sz="2000" dirty="0"/>
           </a:p>
           <a:p>
             <a:pPr algn="l" indent="0" marL="0">
               <a:lnSpc>
-                <a:spcPct val="110000"/>
+                <a:spcPct val="115000"/>
               </a:lnSpc>
               <a:spcAft>
-                <a:spcPts val="1800"/>
+                <a:spcPts val="1600"/>
               </a:spcAft>
               <a:buNone/>
             </a:pPr>
             <a:r>
-              <a:rPr lang="en-US" sz="2800" dirty="0">
-                <a:solidFill>
-                  <a:srgbClr val="000000"/>
-                </a:solidFill>
-                <a:latin typeface="Calibri" pitchFamily="34" charset="0"/>
-                <a:ea typeface="Calibri" pitchFamily="34" charset="-122"/>
-                <a:cs typeface="Calibri" pitchFamily="34" charset="-120"/>
+              <a:rPr lang="en-US" sz="2000" dirty="0">
+                <a:solidFill>
+                  <a:srgbClr val="111111"/>
+                </a:solidFill>
+                <a:latin typeface="Avenir Next" pitchFamily="34" charset="0"/>
+                <a:ea typeface="Avenir Next" pitchFamily="34" charset="-122"/>
+                <a:cs typeface="Avenir Next" pitchFamily="34" charset="-120"/>
               </a:rPr>
               <a:t>4 · A teaching assistant - turn a topic into a quiz.</a:t>
             </a:r>
-            <a:endParaRPr lang="en-US" sz="2800" dirty="0"/>
+            <a:endParaRPr lang="en-US" sz="2000" dirty="0"/>
           </a:p>
           <a:p>
             <a:pPr algn="l" indent="0" marL="0">
               <a:lnSpc>
-                <a:spcPct val="110000"/>
+                <a:spcPct val="115000"/>
               </a:lnSpc>
               <a:spcAft>
-                <a:spcPts val="1800"/>
+                <a:spcPts val="1600"/>
               </a:spcAft>
               <a:buNone/>
             </a:pPr>
-            <a:endParaRPr lang="en-US" sz="2800" dirty="0"/>
+            <a:endParaRPr lang="en-US" sz="2000" dirty="0"/>
           </a:p>
           <a:p>
             <a:pPr algn="l" indent="0" marL="0">
               <a:lnSpc>
-                <a:spcPct val="110000"/>
+                <a:spcPct val="115000"/>
               </a:lnSpc>
               <a:spcAft>
-                <a:spcPts val="1800"/>
+                <a:spcPts val="1600"/>
               </a:spcAft>
               <a:buNone/>
             </a:pPr>
             <a:r>
-              <a:rPr lang="en-US" sz="2800" dirty="0">
-                <a:solidFill>
-                  <a:srgbClr val="00B050"/>
-                </a:solidFill>
-                <a:latin typeface="Calibri" pitchFamily="34" charset="0"/>
-                <a:ea typeface="Calibri" pitchFamily="34" charset="-122"/>
-                <a:cs typeface="Calibri" pitchFamily="34" charset="-120"/>
+              <a:rPr lang="en-US" sz="2000" dirty="0">
+                <a:solidFill>
+                  <a:srgbClr val="2E7A72"/>
+                </a:solidFill>
+                <a:latin typeface="Avenir Next" pitchFamily="34" charset="0"/>
+                <a:ea typeface="Avenir Next" pitchFamily="34" charset="-122"/>
+                <a:cs typeface="Avenir Next" pitchFamily="34" charset="-120"/>
               </a:rPr>
               <a:t>Watch for the moment I change the look - just by asking.</a:t>
             </a:r>
-            <a:endParaRPr lang="en-US" sz="2800" dirty="0"/>
+            <a:endParaRPr lang="en-US" sz="2000" dirty="0"/>
           </a:p>
         </p:txBody>
       </p:sp>
@@ -5200,40 +5545,16 @@
           <a:chExt cx="0" cy="0"/>
         </a:xfrm>
       </p:grpSpPr>
-      <p:pic>
-        <p:nvPicPr>
-          <p:cNvPr id="2" name="Image 0" descr="/Users/batuhangundogdu/Claude Code Workshop/deck/assets/uchicago-footer.png">    </p:cNvPr>
-          <p:cNvPicPr>
-            <a:picLocks noChangeAspect="1"/>
-          </p:cNvPicPr>
-          <p:nvPr/>
-        </p:nvPicPr>
-        <p:blipFill>
-          <a:blip r:embed="rId1"/>
-          <a:stretch>
-            <a:fillRect/>
-          </a:stretch>
-        </p:blipFill>
-        <p:spPr>
-          <a:xfrm>
-            <a:off x="539496" y="6382512"/>
-            <a:ext cx="2843784" cy="475488"/>
-          </a:xfrm>
-          <a:prstGeom prst="rect">
-            <a:avLst/>
-          </a:prstGeom>
-        </p:spPr>
-      </p:pic>
-      <p:sp>
-        <p:nvSpPr>
-          <p:cNvPr id="3" name="Text 0"/>
-          <p:cNvSpPr/>
-          <p:nvPr/>
-        </p:nvSpPr>
-        <p:spPr>
-          <a:xfrm>
-            <a:off x="548640" y="2468880"/>
-            <a:ext cx="11091672" cy="457200"/>
+      <p:sp>
+        <p:nvSpPr>
+          <p:cNvPr id="2" name="Text 0"/>
+          <p:cNvSpPr/>
+          <p:nvPr/>
+        </p:nvSpPr>
+        <p:spPr>
+          <a:xfrm>
+            <a:off x="822960" y="2514600"/>
+            <a:ext cx="10543032" cy="365760"/>
           </a:xfrm>
           <a:prstGeom prst="rect">
             <a:avLst/>
@@ -5249,30 +5570,50 @@
               <a:buNone/>
             </a:pPr>
             <a:r>
-              <a:rPr lang="en-US" sz="2400" spc="200" kern="0" dirty="0">
-                <a:solidFill>
-                  <a:srgbClr val="800000"/>
-                </a:solidFill>
-                <a:latin typeface="Calibri" pitchFamily="34" charset="0"/>
-                <a:ea typeface="Calibri" pitchFamily="34" charset="-122"/>
-                <a:cs typeface="Calibri" pitchFamily="34" charset="-120"/>
+              <a:rPr lang="en-US" sz="1500" b="1" spc="300" kern="0" dirty="0">
+                <a:solidFill>
+                  <a:srgbClr val="2E7A72"/>
+                </a:solidFill>
+                <a:latin typeface="Avenir Next" pitchFamily="34" charset="0"/>
+                <a:ea typeface="Avenir Next" pitchFamily="34" charset="-122"/>
+                <a:cs typeface="Avenir Next" pitchFamily="34" charset="-120"/>
               </a:rPr>
               <a:t>DEMO 1</a:t>
             </a:r>
-            <a:endParaRPr lang="en-US" sz="2400" dirty="0"/>
-          </a:p>
-        </p:txBody>
-      </p:sp>
-      <p:sp>
-        <p:nvSpPr>
-          <p:cNvPr id="4" name="Text 1"/>
-          <p:cNvSpPr/>
-          <p:nvPr/>
-        </p:nvSpPr>
-        <p:spPr>
-          <a:xfrm>
-            <a:off x="548640" y="2926080"/>
-            <a:ext cx="11091672" cy="1463040"/>
+            <a:endParaRPr lang="en-US" sz="1500" dirty="0"/>
+          </a:p>
+        </p:txBody>
+      </p:sp>
+      <p:sp>
+        <p:nvSpPr>
+          <p:cNvPr id="3" name="Shape 1"/>
+          <p:cNvSpPr/>
+          <p:nvPr/>
+        </p:nvSpPr>
+        <p:spPr>
+          <a:xfrm>
+            <a:off x="822960" y="2926080"/>
+            <a:ext cx="566928" cy="41148"/>
+          </a:xfrm>
+          <a:prstGeom prst="rect">
+            <a:avLst/>
+          </a:prstGeom>
+          <a:solidFill>
+            <a:srgbClr val="2E7A72"/>
+          </a:solidFill>
+          <a:ln/>
+        </p:spPr>
+      </p:sp>
+      <p:sp>
+        <p:nvSpPr>
+          <p:cNvPr id="4" name="Text 2"/>
+          <p:cNvSpPr/>
+          <p:nvPr/>
+        </p:nvSpPr>
+        <p:spPr>
+          <a:xfrm>
+            <a:off x="822960" y="3108960"/>
+            <a:ext cx="10543032" cy="1463040"/>
           </a:xfrm>
           <a:prstGeom prst="rect">
             <a:avLst/>
@@ -5285,20 +5626,23 @@
           <a:lstStyle/>
           <a:p>
             <a:pPr algn="l" indent="0" marL="0">
-              <a:buNone/>
-            </a:pPr>
-            <a:r>
-              <a:rPr lang="en-US" sz="5000" b="1" dirty="0">
-                <a:solidFill>
-                  <a:srgbClr val="000000"/>
-                </a:solidFill>
-                <a:latin typeface="Calibri" pitchFamily="34" charset="0"/>
-                <a:ea typeface="Calibri" pitchFamily="34" charset="-122"/>
-                <a:cs typeface="Calibri" pitchFamily="34" charset="-120"/>
+              <a:lnSpc>
+                <a:spcPct val="98000"/>
+              </a:lnSpc>
+              <a:buNone/>
+            </a:pPr>
+            <a:r>
+              <a:rPr lang="en-US" sz="4400" b="1" dirty="0">
+                <a:solidFill>
+                  <a:srgbClr val="111111"/>
+                </a:solidFill>
+                <a:latin typeface="Avenir Next" pitchFamily="34" charset="0"/>
+                <a:ea typeface="Avenir Next" pitchFamily="34" charset="-122"/>
+                <a:cs typeface="Avenir Next" pitchFamily="34" charset="-120"/>
               </a:rPr>
               <a:t>Budget Controller</a:t>
             </a:r>
-            <a:endParaRPr lang="en-US" sz="5000" dirty="0"/>
+            <a:endParaRPr lang="en-US" sz="4400" dirty="0"/>
           </a:p>
         </p:txBody>
       </p:sp>

--- a/deck/workshop.pptx
+++ b/deck/workshop.pptx
@@ -2364,9 +2364,35 @@
           </a:p>
         </p:txBody>
       </p:sp>
-      <p:sp>
-        <p:nvSpPr>
-          <p:cNvPr id="3" name="Text 1"/>
+      <p:pic>
+        <p:nvPicPr>
+          <p:cNvPr id="3" name="Image 0" descr="/Users/batuhangundogdu/Claude Code Workshop/deck/assets/phoenix.png">    </p:cNvPr>
+          <p:cNvPicPr>
+            <a:picLocks noChangeAspect="1"/>
+          </p:cNvPicPr>
+          <p:nvPr/>
+        </p:nvPicPr>
+        <p:blipFill>
+          <a:blip r:embed="rId1">
+            <a:alphaModFix amt="45000"/>
+          </a:blip>
+          <a:stretch>
+            <a:fillRect/>
+          </a:stretch>
+        </p:blipFill>
+        <p:spPr>
+          <a:xfrm>
+            <a:off x="8311896" y="749808"/>
+            <a:ext cx="5769864" cy="5047488"/>
+          </a:xfrm>
+          <a:prstGeom prst="rect">
+            <a:avLst/>
+          </a:prstGeom>
+        </p:spPr>
+      </p:pic>
+      <p:sp>
+        <p:nvSpPr>
+          <p:cNvPr id="4" name="Text 1"/>
           <p:cNvSpPr/>
           <p:nvPr/>
         </p:nvSpPr>
@@ -2408,7 +2434,7 @@
       </p:sp>
       <p:sp>
         <p:nvSpPr>
-          <p:cNvPr id="4" name="Shape 2"/>
+          <p:cNvPr id="5" name="Shape 2"/>
           <p:cNvSpPr/>
           <p:nvPr/>
         </p:nvSpPr>
@@ -2421,14 +2447,14 @@
             <a:avLst/>
           </a:prstGeom>
           <a:solidFill>
-            <a:srgbClr val="2E7A72"/>
+            <a:srgbClr val="800000"/>
           </a:solidFill>
           <a:ln/>
         </p:spPr>
       </p:sp>
       <p:sp>
         <p:nvSpPr>
-          <p:cNvPr id="5" name="Text 3"/>
+          <p:cNvPr id="6" name="Text 3"/>
           <p:cNvSpPr/>
           <p:nvPr/>
         </p:nvSpPr>
@@ -2467,7 +2493,7 @@
       </p:sp>
       <p:sp>
         <p:nvSpPr>
-          <p:cNvPr id="6" name="Text 4"/>
+          <p:cNvPr id="7" name="Text 4"/>
           <p:cNvSpPr/>
           <p:nvPr/>
         </p:nvSpPr>
@@ -2492,7 +2518,7 @@
             <a:r>
               <a:rPr lang="en-US" sz="1400" b="1" spc="200" kern="0" dirty="0">
                 <a:solidFill>
-                  <a:srgbClr val="2E7A72"/>
+                  <a:srgbClr val="800000"/>
                 </a:solidFill>
                 <a:latin typeface="Avenir Next" pitchFamily="34" charset="0"/>
                 <a:ea typeface="Avenir Next" pitchFamily="34" charset="-122"/>
@@ -2556,7 +2582,7 @@
             <a:r>
               <a:rPr lang="en-US" sz="1500" b="1" spc="300" kern="0" dirty="0">
                 <a:solidFill>
-                  <a:srgbClr val="2E7A72"/>
+                  <a:srgbClr val="800000"/>
                 </a:solidFill>
                 <a:latin typeface="Avenir Next" pitchFamily="34" charset="0"/>
                 <a:ea typeface="Avenir Next" pitchFamily="34" charset="-122"/>
@@ -2583,7 +2609,7 @@
             <a:avLst/>
           </a:prstGeom>
           <a:solidFill>
-            <a:srgbClr val="2E7A72"/>
+            <a:srgbClr val="800000"/>
           </a:solidFill>
           <a:ln/>
         </p:spPr>
@@ -2682,7 +2708,7 @@
             <a:r>
               <a:rPr lang="en-US" sz="1500" b="1" spc="300" kern="0" dirty="0">
                 <a:solidFill>
-                  <a:srgbClr val="2E7A72"/>
+                  <a:srgbClr val="800000"/>
                 </a:solidFill>
                 <a:latin typeface="Avenir Next" pitchFamily="34" charset="0"/>
                 <a:ea typeface="Avenir Next" pitchFamily="34" charset="-122"/>
@@ -2709,7 +2735,7 @@
             <a:avLst/>
           </a:prstGeom>
           <a:solidFill>
-            <a:srgbClr val="2E7A72"/>
+            <a:srgbClr val="800000"/>
           </a:solidFill>
           <a:ln/>
         </p:spPr>
@@ -2808,7 +2834,7 @@
             <a:r>
               <a:rPr lang="en-US" sz="1500" b="1" spc="300" kern="0" dirty="0">
                 <a:solidFill>
-                  <a:srgbClr val="2E7A72"/>
+                  <a:srgbClr val="800000"/>
                 </a:solidFill>
                 <a:latin typeface="Avenir Next" pitchFamily="34" charset="0"/>
                 <a:ea typeface="Avenir Next" pitchFamily="34" charset="-122"/>
@@ -2835,7 +2861,7 @@
             <a:avLst/>
           </a:prstGeom>
           <a:solidFill>
-            <a:srgbClr val="2E7A72"/>
+            <a:srgbClr val="800000"/>
           </a:solidFill>
           <a:ln/>
         </p:spPr>
@@ -2961,7 +2987,7 @@
             <a:avLst/>
           </a:prstGeom>
           <a:solidFill>
-            <a:srgbClr val="2E7A72"/>
+            <a:srgbClr val="800000"/>
           </a:solidFill>
           <a:ln/>
         </p:spPr>
@@ -3041,7 +3067,7 @@
             <a:r>
               <a:rPr lang="en-US" sz="2000" dirty="0">
                 <a:solidFill>
-                  <a:srgbClr val="2E7A72"/>
+                  <a:srgbClr val="800000"/>
                 </a:solidFill>
                 <a:latin typeface="Avenir Next" pitchFamily="34" charset="0"/>
                 <a:ea typeface="Avenir Next" pitchFamily="34" charset="-122"/>
@@ -3064,7 +3090,7 @@
             <a:r>
               <a:rPr lang="en-US" sz="2000" dirty="0">
                 <a:solidFill>
-                  <a:srgbClr val="2E7A72"/>
+                  <a:srgbClr val="800000"/>
                 </a:solidFill>
                 <a:latin typeface="Avenir Next" pitchFamily="34" charset="0"/>
                 <a:ea typeface="Avenir Next" pitchFamily="34" charset="-122"/>
@@ -3087,7 +3113,7 @@
             <a:r>
               <a:rPr lang="en-US" sz="2000" dirty="0">
                 <a:solidFill>
-                  <a:srgbClr val="2E7A72"/>
+                  <a:srgbClr val="800000"/>
                 </a:solidFill>
                 <a:latin typeface="Avenir Next" pitchFamily="34" charset="0"/>
                 <a:ea typeface="Avenir Next" pitchFamily="34" charset="-122"/>
@@ -3122,7 +3148,7 @@
             <a:r>
               <a:rPr lang="en-US" sz="2000" dirty="0">
                 <a:solidFill>
-                  <a:srgbClr val="2E7A72"/>
+                  <a:srgbClr val="800000"/>
                 </a:solidFill>
                 <a:latin typeface="Avenir Next" pitchFamily="34" charset="0"/>
                 <a:ea typeface="Avenir Next" pitchFamily="34" charset="-122"/>
@@ -3186,7 +3212,7 @@
             <a:r>
               <a:rPr lang="en-US" sz="1500" b="1" spc="300" kern="0" dirty="0">
                 <a:solidFill>
-                  <a:srgbClr val="2E7A72"/>
+                  <a:srgbClr val="800000"/>
                 </a:solidFill>
                 <a:latin typeface="Avenir Next" pitchFamily="34" charset="0"/>
                 <a:ea typeface="Avenir Next" pitchFamily="34" charset="-122"/>
@@ -3213,7 +3239,7 @@
             <a:avLst/>
           </a:prstGeom>
           <a:solidFill>
-            <a:srgbClr val="2E7A72"/>
+            <a:srgbClr val="800000"/>
           </a:solidFill>
           <a:ln/>
         </p:spPr>
@@ -3339,7 +3365,7 @@
             <a:avLst/>
           </a:prstGeom>
           <a:solidFill>
-            <a:srgbClr val="2E7A72"/>
+            <a:srgbClr val="800000"/>
           </a:solidFill>
           <a:ln/>
         </p:spPr>
@@ -3371,7 +3397,7 @@
             <a:r>
               <a:rPr lang="en-US" sz="13000" b="1" dirty="0">
                 <a:solidFill>
-                  <a:srgbClr val="2E7A72"/>
+                  <a:srgbClr val="800000"/>
                 </a:solidFill>
                 <a:latin typeface="Avenir Next" pitchFamily="34" charset="0"/>
                 <a:ea typeface="Avenir Next" pitchFamily="34" charset="-122"/>
@@ -3504,7 +3530,7 @@
             <a:avLst/>
           </a:prstGeom>
           <a:solidFill>
-            <a:srgbClr val="2E7A72"/>
+            <a:srgbClr val="800000"/>
           </a:solidFill>
           <a:ln/>
         </p:spPr>
@@ -3584,7 +3610,7 @@
             <a:r>
               <a:rPr lang="en-US" sz="2000" dirty="0">
                 <a:solidFill>
-                  <a:srgbClr val="2E7A72"/>
+                  <a:srgbClr val="800000"/>
                 </a:solidFill>
                 <a:latin typeface="Avenir Next" pitchFamily="34" charset="0"/>
                 <a:ea typeface="Avenir Next" pitchFamily="34" charset="-122"/>
@@ -3756,7 +3782,7 @@
             <a:avLst/>
           </a:prstGeom>
           <a:solidFill>
-            <a:srgbClr val="2E7A72"/>
+            <a:srgbClr val="800000"/>
           </a:solidFill>
           <a:ln/>
         </p:spPr>
@@ -3836,7 +3862,7 @@
             <a:r>
               <a:rPr lang="en-US" sz="2000" dirty="0">
                 <a:solidFill>
-                  <a:srgbClr val="2E7A72"/>
+                  <a:srgbClr val="800000"/>
                 </a:solidFill>
                 <a:latin typeface="Avenir Next" pitchFamily="34" charset="0"/>
                 <a:ea typeface="Avenir Next" pitchFamily="34" charset="-122"/>
@@ -3894,7 +3920,7 @@
             <a:r>
               <a:rPr lang="en-US" sz="2000" dirty="0">
                 <a:solidFill>
-                  <a:srgbClr val="2E7A72"/>
+                  <a:srgbClr val="800000"/>
                 </a:solidFill>
                 <a:latin typeface="Avenir Next" pitchFamily="34" charset="0"/>
                 <a:ea typeface="Avenir Next" pitchFamily="34" charset="-122"/>
@@ -3985,7 +4011,7 @@
             <a:avLst/>
           </a:prstGeom>
           <a:solidFill>
-            <a:srgbClr val="2E7A72"/>
+            <a:srgbClr val="800000"/>
           </a:solidFill>
           <a:ln/>
         </p:spPr>
@@ -4100,7 +4126,7 @@
             <a:r>
               <a:rPr lang="en-US" sz="2000" dirty="0">
                 <a:solidFill>
-                  <a:srgbClr val="2E7A72"/>
+                  <a:srgbClr val="800000"/>
                 </a:solidFill>
                 <a:latin typeface="Avenir Next" pitchFamily="34" charset="0"/>
                 <a:ea typeface="Avenir Next" pitchFamily="34" charset="-122"/>
@@ -4123,7 +4149,7 @@
             <a:r>
               <a:rPr lang="en-US" sz="2000" dirty="0">
                 <a:solidFill>
-                  <a:srgbClr val="2E7A72"/>
+                  <a:srgbClr val="800000"/>
                 </a:solidFill>
                 <a:latin typeface="Avenir Next" pitchFamily="34" charset="0"/>
                 <a:ea typeface="Avenir Next" pitchFamily="34" charset="-122"/>
@@ -4210,7 +4236,7 @@
             <a:r>
               <a:rPr lang="en-US" sz="1500" b="1" spc="300" kern="0" dirty="0">
                 <a:solidFill>
-                  <a:srgbClr val="2E7A72"/>
+                  <a:srgbClr val="800000"/>
                 </a:solidFill>
                 <a:latin typeface="Avenir Next" pitchFamily="34" charset="0"/>
                 <a:ea typeface="Avenir Next" pitchFamily="34" charset="-122"/>
@@ -4237,7 +4263,7 @@
             <a:avLst/>
           </a:prstGeom>
           <a:solidFill>
-            <a:srgbClr val="2E7A72"/>
+            <a:srgbClr val="800000"/>
           </a:solidFill>
           <a:ln/>
         </p:spPr>
@@ -4363,7 +4389,7 @@
             <a:avLst/>
           </a:prstGeom>
           <a:solidFill>
-            <a:srgbClr val="2E7A72"/>
+            <a:srgbClr val="800000"/>
           </a:solidFill>
           <a:ln/>
         </p:spPr>
@@ -4443,7 +4469,7 @@
             <a:r>
               <a:rPr lang="en-US" sz="2000" dirty="0">
                 <a:solidFill>
-                  <a:srgbClr val="2E7A72"/>
+                  <a:srgbClr val="800000"/>
                 </a:solidFill>
                 <a:latin typeface="Avenir Next" pitchFamily="34" charset="0"/>
                 <a:ea typeface="Avenir Next" pitchFamily="34" charset="-122"/>
@@ -4489,7 +4515,7 @@
             <a:r>
               <a:rPr lang="en-US" sz="2000" dirty="0">
                 <a:solidFill>
-                  <a:srgbClr val="2E7A72"/>
+                  <a:srgbClr val="800000"/>
                 </a:solidFill>
                 <a:latin typeface="Avenir Next" pitchFamily="34" charset="0"/>
                 <a:ea typeface="Avenir Next" pitchFamily="34" charset="-122"/>
@@ -4615,7 +4641,7 @@
             <a:avLst/>
           </a:prstGeom>
           <a:solidFill>
-            <a:srgbClr val="2E7A72"/>
+            <a:srgbClr val="800000"/>
           </a:solidFill>
           <a:ln/>
         </p:spPr>
@@ -4832,7 +4858,7 @@
             <a:r>
               <a:rPr lang="en-US" sz="2000" dirty="0">
                 <a:solidFill>
-                  <a:srgbClr val="2E7A72"/>
+                  <a:srgbClr val="800000"/>
                 </a:solidFill>
                 <a:latin typeface="Avenir Next" pitchFamily="34" charset="0"/>
                 <a:ea typeface="Avenir Next" pitchFamily="34" charset="-122"/>
@@ -4855,7 +4881,7 @@
             <a:r>
               <a:rPr lang="en-US" sz="2000" dirty="0">
                 <a:solidFill>
-                  <a:srgbClr val="2E7A72"/>
+                  <a:srgbClr val="800000"/>
                 </a:solidFill>
                 <a:latin typeface="Avenir Next" pitchFamily="34" charset="0"/>
                 <a:ea typeface="Avenir Next" pitchFamily="34" charset="-122"/>
@@ -4878,7 +4904,7 @@
             <a:r>
               <a:rPr lang="en-US" sz="2000" dirty="0">
                 <a:solidFill>
-                  <a:srgbClr val="2E7A72"/>
+                  <a:srgbClr val="800000"/>
                 </a:solidFill>
                 <a:latin typeface="Avenir Next" pitchFamily="34" charset="0"/>
                 <a:ea typeface="Avenir Next" pitchFamily="34" charset="-122"/>
@@ -4969,7 +4995,7 @@
             <a:avLst/>
           </a:prstGeom>
           <a:solidFill>
-            <a:srgbClr val="2E7A72"/>
+            <a:srgbClr val="800000"/>
           </a:solidFill>
           <a:ln/>
         </p:spPr>
@@ -5049,7 +5075,7 @@
             <a:r>
               <a:rPr lang="en-US" sz="2000" dirty="0">
                 <a:solidFill>
-                  <a:srgbClr val="2E7A72"/>
+                  <a:srgbClr val="800000"/>
                 </a:solidFill>
                 <a:latin typeface="Avenir Next" pitchFamily="34" charset="0"/>
                 <a:ea typeface="Avenir Next" pitchFamily="34" charset="-122"/>
@@ -5072,7 +5098,7 @@
             <a:r>
               <a:rPr lang="en-US" sz="2000" dirty="0">
                 <a:solidFill>
-                  <a:srgbClr val="2E7A72"/>
+                  <a:srgbClr val="800000"/>
                 </a:solidFill>
                 <a:latin typeface="Avenir Next" pitchFamily="34" charset="0"/>
                 <a:ea typeface="Avenir Next" pitchFamily="34" charset="-122"/>
@@ -5171,7 +5197,7 @@
             <a:r>
               <a:rPr lang="en-US" sz="1500" b="1" spc="300" kern="0" dirty="0">
                 <a:solidFill>
-                  <a:srgbClr val="2E7A72"/>
+                  <a:srgbClr val="800000"/>
                 </a:solidFill>
                 <a:latin typeface="Avenir Next" pitchFamily="34" charset="0"/>
                 <a:ea typeface="Avenir Next" pitchFamily="34" charset="-122"/>
@@ -5198,7 +5224,7 @@
             <a:avLst/>
           </a:prstGeom>
           <a:solidFill>
-            <a:srgbClr val="2E7A72"/>
+            <a:srgbClr val="800000"/>
           </a:solidFill>
           <a:ln/>
         </p:spPr>
@@ -5324,7 +5350,7 @@
             <a:avLst/>
           </a:prstGeom>
           <a:solidFill>
-            <a:srgbClr val="2E7A72"/>
+            <a:srgbClr val="800000"/>
           </a:solidFill>
           <a:ln/>
         </p:spPr>
@@ -5508,7 +5534,7 @@
             <a:r>
               <a:rPr lang="en-US" sz="2000" dirty="0">
                 <a:solidFill>
-                  <a:srgbClr val="2E7A72"/>
+                  <a:srgbClr val="800000"/>
                 </a:solidFill>
                 <a:latin typeface="Avenir Next" pitchFamily="34" charset="0"/>
                 <a:ea typeface="Avenir Next" pitchFamily="34" charset="-122"/>
@@ -5572,7 +5598,7 @@
             <a:r>
               <a:rPr lang="en-US" sz="1500" b="1" spc="300" kern="0" dirty="0">
                 <a:solidFill>
-                  <a:srgbClr val="2E7A72"/>
+                  <a:srgbClr val="800000"/>
                 </a:solidFill>
                 <a:latin typeface="Avenir Next" pitchFamily="34" charset="0"/>
                 <a:ea typeface="Avenir Next" pitchFamily="34" charset="-122"/>
@@ -5599,7 +5625,7 @@
             <a:avLst/>
           </a:prstGeom>
           <a:solidFill>
-            <a:srgbClr val="2E7A72"/>
+            <a:srgbClr val="800000"/>
           </a:solidFill>
           <a:ln/>
         </p:spPr>
